--- a/lectures/PY4E-03-Conditional.pptx
+++ b/lectures/PY4E-03-Conditional.pptx
@@ -16832,7 +16832,7 @@
               <a:buNone/>
             </a:pPr>
             <a:r>
-              <a:rPr lang="en-US" sz="3600" u="none" strike="noStrike" cap="none" dirty="0">
+              <a:rPr lang="en-US" sz="3600" b="1" u="none" strike="noStrike" cap="none" dirty="0">
                 <a:solidFill>
                   <a:schemeClr val="lt1"/>
                 </a:solidFill>
@@ -16857,7 +16857,7 @@
               </a:spcAft>
               <a:buNone/>
             </a:pPr>
-            <a:endParaRPr sz="3600" u="none" strike="noStrike" cap="none" dirty="0">
+            <a:endParaRPr sz="3600" b="1" u="none" strike="noStrike" cap="none" dirty="0">
               <a:solidFill>
                 <a:srgbClr val="FF7F00"/>
               </a:solidFill>
@@ -16886,7 +16886,7 @@
               <a:buNone/>
             </a:pPr>
             <a:r>
-              <a:rPr lang="en-US" sz="2800" u="none" strike="noStrike" cap="none" dirty="0">
+              <a:rPr lang="en-US" sz="2800" b="1" u="none" strike="noStrike" cap="none" dirty="0">
                 <a:solidFill>
                   <a:srgbClr val="00FF00"/>
                 </a:solidFill>
@@ -16917,7 +16917,7 @@
               <a:buNone/>
             </a:pPr>
             <a:r>
-              <a:rPr lang="en-US" sz="2800" u="none" strike="noStrike" cap="none" dirty="0">
+              <a:rPr lang="en-US" sz="2800" b="1" u="none" strike="noStrike" cap="none" dirty="0">
                 <a:solidFill>
                   <a:srgbClr val="FFFF00"/>
                 </a:solidFill>
@@ -16929,7 +16929,7 @@
               <a:t>if</a:t>
             </a:r>
             <a:r>
-              <a:rPr lang="en-US" sz="2800" u="none" strike="noStrike" cap="none" dirty="0">
+              <a:rPr lang="en-US" sz="2800" b="1" u="none" strike="noStrike" cap="none" dirty="0">
                 <a:solidFill>
                   <a:srgbClr val="FF7F00"/>
                 </a:solidFill>
@@ -16941,7 +16941,7 @@
               <a:t> </a:t>
             </a:r>
             <a:r>
-              <a:rPr lang="en-US" sz="2800" u="none" strike="noStrike" cap="none" dirty="0">
+              <a:rPr lang="en-US" sz="2800" b="1" u="none" strike="noStrike" cap="none" dirty="0">
                 <a:solidFill>
                   <a:srgbClr val="00FF00"/>
                 </a:solidFill>
@@ -16961,7 +16961,7 @@
               <a:buSzPct val="25000"/>
             </a:pPr>
             <a:r>
-              <a:rPr lang="en-US" sz="2800" u="none" strike="noStrike" cap="none" dirty="0">
+              <a:rPr lang="en-US" sz="2800" b="1" u="none" strike="noStrike" cap="none" dirty="0">
                 <a:solidFill>
                   <a:srgbClr val="FF7F00"/>
                 </a:solidFill>
@@ -16973,7 +16973,7 @@
               <a:t>    </a:t>
             </a:r>
             <a:r>
-              <a:rPr lang="en-US" sz="2800" u="none" strike="noStrike" cap="none" dirty="0">
+              <a:rPr lang="en-US" sz="2800" b="1" u="none" strike="noStrike" cap="none" dirty="0">
                 <a:solidFill>
                   <a:srgbClr val="FFFF00"/>
                 </a:solidFill>
@@ -16985,7 +16985,7 @@
               <a:t>print(</a:t>
             </a:r>
             <a:r>
-              <a:rPr lang="en-US" sz="2800" u="none" strike="noStrike" cap="none" dirty="0">
+              <a:rPr lang="en-US" sz="2800" b="1" u="none" strike="noStrike" cap="none" dirty="0">
                 <a:solidFill>
                   <a:srgbClr val="00FF00"/>
                 </a:solidFill>
@@ -16997,7 +16997,7 @@
               <a:t>'</a:t>
             </a:r>
             <a:r>
-              <a:rPr lang="en-US" sz="2800" dirty="0">
+              <a:rPr lang="en-US" sz="2800" b="1" dirty="0">
                 <a:solidFill>
                   <a:srgbClr val="00FF00"/>
                 </a:solidFill>
@@ -17009,7 +17009,7 @@
               <a:t>Smaller'</a:t>
             </a:r>
             <a:r>
-              <a:rPr lang="en-US" sz="2800" dirty="0">
+              <a:rPr lang="en-US" sz="2800" b="1" dirty="0">
                 <a:solidFill>
                   <a:srgbClr val="FFFF00"/>
                 </a:solidFill>
@@ -17020,7 +17020,7 @@
               </a:rPr>
               <a:t>)</a:t>
             </a:r>
-            <a:endParaRPr lang="en-US" sz="2800" u="none" strike="noStrike" cap="none" dirty="0">
+            <a:endParaRPr lang="en-US" sz="2800" b="1" u="none" strike="noStrike" cap="none" dirty="0">
               <a:solidFill>
                 <a:srgbClr val="00FF00"/>
               </a:solidFill>
@@ -17049,7 +17049,7 @@
               <a:buNone/>
             </a:pPr>
             <a:r>
-              <a:rPr lang="en-US" sz="2800" u="none" strike="noStrike" cap="none" dirty="0">
+              <a:rPr lang="en-US" sz="2800" b="1" u="none" strike="noStrike" cap="none" dirty="0">
                 <a:solidFill>
                   <a:srgbClr val="FFFF00"/>
                 </a:solidFill>
@@ -17061,7 +17061,7 @@
               <a:t>if</a:t>
             </a:r>
             <a:r>
-              <a:rPr lang="en-US" sz="2800" u="none" strike="noStrike" cap="none" dirty="0">
+              <a:rPr lang="en-US" sz="2800" b="1" u="none" strike="noStrike" cap="none" dirty="0">
                 <a:solidFill>
                   <a:srgbClr val="FF7F00"/>
                 </a:solidFill>
@@ -17073,7 +17073,7 @@
               <a:t> </a:t>
             </a:r>
             <a:r>
-              <a:rPr lang="en-US" sz="2800" u="none" strike="noStrike" cap="none" dirty="0">
+              <a:rPr lang="en-US" sz="2800" b="1" u="none" strike="noStrike" cap="none" dirty="0">
                 <a:solidFill>
                   <a:srgbClr val="00FF00"/>
                 </a:solidFill>
@@ -17093,7 +17093,7 @@
               <a:buSzPct val="25000"/>
             </a:pPr>
             <a:r>
-              <a:rPr lang="en-US" sz="2800" u="none" strike="noStrike" cap="none" dirty="0">
+              <a:rPr lang="en-US" sz="2800" b="1" u="none" strike="noStrike" cap="none" dirty="0">
                 <a:solidFill>
                   <a:srgbClr val="FF7F00"/>
                 </a:solidFill>
@@ -17105,7 +17105,7 @@
               <a:t>    </a:t>
             </a:r>
             <a:r>
-              <a:rPr lang="en-US" sz="2800" u="none" strike="noStrike" cap="none" dirty="0">
+              <a:rPr lang="en-US" sz="2800" b="1" u="none" strike="noStrike" cap="none" dirty="0">
                 <a:solidFill>
                   <a:srgbClr val="FFFF00"/>
                 </a:solidFill>
@@ -17117,7 +17117,7 @@
               <a:t>print(</a:t>
             </a:r>
             <a:r>
-              <a:rPr lang="en-US" sz="2800" u="none" strike="noStrike" cap="none" dirty="0">
+              <a:rPr lang="en-US" sz="2800" b="1" u="none" strike="noStrike" cap="none" dirty="0">
                 <a:solidFill>
                   <a:srgbClr val="00FF00"/>
                 </a:solidFill>
@@ -17129,7 +17129,7 @@
               <a:t>'</a:t>
             </a:r>
             <a:r>
-              <a:rPr lang="en-US" sz="2800" dirty="0">
+              <a:rPr lang="en-US" sz="2800" b="1" dirty="0">
                 <a:solidFill>
                   <a:srgbClr val="00FF00"/>
                 </a:solidFill>
@@ -17141,7 +17141,7 @@
               <a:t>Bigger'</a:t>
             </a:r>
             <a:r>
-              <a:rPr lang="en-US" sz="2800" dirty="0">
+              <a:rPr lang="en-US" sz="2800" b="1" dirty="0">
                 <a:solidFill>
                   <a:srgbClr val="FFFF00"/>
                 </a:solidFill>
@@ -17152,7 +17152,7 @@
               </a:rPr>
               <a:t>)</a:t>
             </a:r>
-            <a:endParaRPr lang="en-US" sz="2800" u="none" strike="noStrike" cap="none" dirty="0">
+            <a:endParaRPr lang="en-US" sz="2800" b="1" u="none" strike="noStrike" cap="none" dirty="0">
               <a:solidFill>
                 <a:srgbClr val="00FF00"/>
               </a:solidFill>
@@ -17175,7 +17175,7 @@
               </a:spcAft>
               <a:buNone/>
             </a:pPr>
-            <a:endParaRPr sz="2800" u="none" strike="noStrike" cap="none" dirty="0">
+            <a:endParaRPr sz="2800" b="1" u="none" strike="noStrike" cap="none" dirty="0">
               <a:solidFill>
                 <a:srgbClr val="00FF00"/>
               </a:solidFill>
@@ -17193,7 +17193,7 @@
               <a:buSzPct val="25000"/>
             </a:pPr>
             <a:r>
-              <a:rPr lang="en-US" sz="2800" dirty="0">
+              <a:rPr lang="en-US" sz="2800" b="1" dirty="0">
                 <a:solidFill>
                   <a:srgbClr val="FFFF00"/>
                 </a:solidFill>
@@ -17205,7 +17205,7 @@
               <a:t>p</a:t>
             </a:r>
             <a:r>
-              <a:rPr lang="en-US" sz="2800" u="none" strike="noStrike" cap="none" dirty="0">
+              <a:rPr lang="en-US" sz="2800" b="1" u="none" strike="noStrike" cap="none" dirty="0">
                 <a:solidFill>
                   <a:srgbClr val="FFFF00"/>
                 </a:solidFill>
@@ -17217,7 +17217,7 @@
               <a:t>rint(</a:t>
             </a:r>
             <a:r>
-              <a:rPr lang="en-US" sz="2800" u="none" strike="noStrike" cap="none" dirty="0">
+              <a:rPr lang="en-US" sz="2800" b="1" u="none" strike="noStrike" cap="none" dirty="0">
                 <a:solidFill>
                   <a:srgbClr val="00FF00"/>
                 </a:solidFill>
@@ -17229,7 +17229,7 @@
               <a:t>'Finis'</a:t>
             </a:r>
             <a:r>
-              <a:rPr lang="en-US" sz="2800" dirty="0">
+              <a:rPr lang="en-US" sz="2800" b="1" dirty="0">
                 <a:solidFill>
                   <a:srgbClr val="FFFF00"/>
                 </a:solidFill>
@@ -17240,7 +17240,7 @@
               </a:rPr>
               <a:t>)</a:t>
             </a:r>
-            <a:endParaRPr lang="en-US" sz="2800" u="none" strike="noStrike" cap="none" dirty="0">
+            <a:endParaRPr lang="en-US" sz="2800" b="1" u="none" strike="noStrike" cap="none" dirty="0">
               <a:solidFill>
                 <a:srgbClr val="00FF00"/>
               </a:solidFill>
@@ -29239,7 +29239,7 @@
               <a:buNone/>
             </a:pPr>
             <a:r>
-              <a:rPr lang="en-US" sz="3000" i="0" u="none" strike="noStrike" cap="none" dirty="0">
+              <a:rPr lang="en-US" sz="3000" b="1" i="0" u="none" strike="noStrike" cap="none" dirty="0">
                 <a:solidFill>
                   <a:schemeClr val="lt1"/>
                 </a:solidFill>
@@ -29270,7 +29270,7 @@
               <a:buNone/>
             </a:pPr>
             <a:r>
-              <a:rPr lang="en-US" sz="3000" i="0" u="none" strike="noStrike" cap="none" dirty="0">
+              <a:rPr lang="en-US" sz="3000" b="1" i="0" u="none" strike="noStrike" cap="none" dirty="0">
                 <a:solidFill>
                   <a:srgbClr val="00FF00"/>
                 </a:solidFill>
@@ -29290,7 +29290,7 @@
               <a:buSzPct val="25000"/>
             </a:pPr>
             <a:r>
-              <a:rPr lang="en-US" sz="3000" i="0" u="none" strike="noStrike" cap="none" dirty="0">
+              <a:rPr lang="en-US" sz="3000" b="1" i="0" u="none" strike="noStrike" cap="none" dirty="0">
                 <a:solidFill>
                   <a:srgbClr val="00FF00"/>
                 </a:solidFill>
@@ -29302,7 +29302,7 @@
               <a:t>    print('Equals 5</a:t>
             </a:r>
             <a:r>
-              <a:rPr lang="en-US" sz="3000" dirty="0">
+              <a:rPr lang="en-US" sz="3000" b="1" dirty="0">
                 <a:solidFill>
                   <a:srgbClr val="00FF00"/>
                 </a:solidFill>
@@ -29313,7 +29313,7 @@
               </a:rPr>
               <a:t>')</a:t>
             </a:r>
-            <a:endParaRPr lang="en-US" sz="3000" i="0" u="none" strike="noStrike" cap="none" dirty="0">
+            <a:endParaRPr lang="en-US" sz="3000" b="1" i="0" u="none" strike="noStrike" cap="none" dirty="0">
               <a:solidFill>
                 <a:srgbClr val="00FF00"/>
               </a:solidFill>
@@ -29342,7 +29342,7 @@
               <a:buNone/>
             </a:pPr>
             <a:r>
-              <a:rPr lang="en-US" sz="3000" i="0" u="none" strike="noStrike" cap="none" dirty="0">
+              <a:rPr lang="en-US" sz="3000" b="1" i="0" u="none" strike="noStrike" cap="none" dirty="0">
                 <a:solidFill>
                   <a:srgbClr val="FF00FF"/>
                 </a:solidFill>
@@ -29362,7 +29362,7 @@
               <a:buSzPct val="25000"/>
             </a:pPr>
             <a:r>
-              <a:rPr lang="en-US" sz="3000" i="0" u="none" strike="noStrike" cap="none" dirty="0">
+              <a:rPr lang="en-US" sz="3000" b="1" i="0" u="none" strike="noStrike" cap="none" dirty="0">
                 <a:solidFill>
                   <a:srgbClr val="FF00FF"/>
                 </a:solidFill>
@@ -29374,7 +29374,7 @@
               <a:t>   print('Greater than 4</a:t>
             </a:r>
             <a:r>
-              <a:rPr lang="en-US" sz="3000" dirty="0">
+              <a:rPr lang="en-US" sz="3000" b="1" dirty="0">
                 <a:solidFill>
                   <a:srgbClr val="FF00FF"/>
                 </a:solidFill>
@@ -29405,7 +29405,7 @@
               <a:buNone/>
             </a:pPr>
             <a:r>
-              <a:rPr lang="en-US" sz="3000" i="0" u="none" strike="noStrike" cap="none" dirty="0">
+              <a:rPr lang="en-US" sz="3000" b="1" i="0" u="none" strike="noStrike" cap="none" dirty="0">
                 <a:solidFill>
                   <a:srgbClr val="FF9900"/>
                 </a:solidFill>
@@ -29425,7 +29425,7 @@
               <a:buSzPct val="25000"/>
             </a:pPr>
             <a:r>
-              <a:rPr lang="en-US" sz="3000" i="0" u="none" strike="noStrike" cap="none" dirty="0">
+              <a:rPr lang="en-US" sz="3000" b="1" i="0" u="none" strike="noStrike" cap="none" dirty="0">
                 <a:solidFill>
                   <a:srgbClr val="FF9900"/>
                 </a:solidFill>
@@ -29437,7 +29437,7 @@
               <a:t>    print('Greater than or Equals 5</a:t>
             </a:r>
             <a:r>
-              <a:rPr lang="en-US" sz="3000" dirty="0">
+              <a:rPr lang="en-US" sz="3000" b="1" dirty="0">
                 <a:solidFill>
                   <a:srgbClr val="FF9900"/>
                 </a:solidFill>
@@ -29448,7 +29448,7 @@
               </a:rPr>
               <a:t>')</a:t>
             </a:r>
-            <a:endParaRPr lang="en-US" sz="3000" i="0" u="none" strike="noStrike" cap="none" dirty="0">
+            <a:endParaRPr lang="en-US" sz="3000" b="1" i="0" u="none" strike="noStrike" cap="none" dirty="0">
               <a:solidFill>
                 <a:srgbClr val="FF9900"/>
               </a:solidFill>
@@ -29466,7 +29466,7 @@
               <a:buSzPct val="25000"/>
             </a:pPr>
             <a:r>
-              <a:rPr lang="en-US" sz="3000" i="0" u="none" strike="noStrike" cap="none" dirty="0">
+              <a:rPr lang="en-US" sz="3000" b="1" i="0" u="none" strike="noStrike" cap="none" dirty="0">
                 <a:solidFill>
                   <a:srgbClr val="D9D9D9"/>
                 </a:solidFill>
@@ -29478,7 +29478,7 @@
               <a:t>if x &lt; 6 : print('Less than 6</a:t>
             </a:r>
             <a:r>
-              <a:rPr lang="en-US" sz="3000" dirty="0">
+              <a:rPr lang="en-US" sz="3000" b="1" dirty="0">
                 <a:solidFill>
                   <a:srgbClr val="D9D9D9"/>
                 </a:solidFill>
@@ -29489,7 +29489,7 @@
               </a:rPr>
               <a:t>') </a:t>
             </a:r>
-            <a:endParaRPr lang="en-US" sz="3000" i="0" u="none" strike="noStrike" cap="none" dirty="0">
+            <a:endParaRPr lang="en-US" sz="3000" b="1" i="0" u="none" strike="noStrike" cap="none" dirty="0">
               <a:solidFill>
                 <a:srgbClr val="D9D9D9"/>
               </a:solidFill>
@@ -29518,7 +29518,7 @@
               <a:buNone/>
             </a:pPr>
             <a:r>
-              <a:rPr lang="en-US" sz="3000" i="0" u="none" strike="noStrike" cap="none" dirty="0">
+              <a:rPr lang="en-US" sz="3000" b="1" i="0" u="none" strike="noStrike" cap="none" dirty="0">
                 <a:solidFill>
                   <a:srgbClr val="FFFF00"/>
                 </a:solidFill>
@@ -29538,7 +29538,7 @@
               <a:buSzPct val="25000"/>
             </a:pPr>
             <a:r>
-              <a:rPr lang="en-US" sz="3000" i="0" u="none" strike="noStrike" cap="none" dirty="0">
+              <a:rPr lang="en-US" sz="3000" b="1" i="0" u="none" strike="noStrike" cap="none" dirty="0">
                 <a:solidFill>
                   <a:srgbClr val="FFFF00"/>
                 </a:solidFill>
@@ -29550,7 +29550,7 @@
               <a:t>    print('Less than or Equals 5</a:t>
             </a:r>
             <a:r>
-              <a:rPr lang="en-US" sz="3000" dirty="0">
+              <a:rPr lang="en-US" sz="3000" b="1" dirty="0">
                 <a:solidFill>
                   <a:srgbClr val="FFFF00"/>
                 </a:solidFill>
@@ -29581,7 +29581,7 @@
               <a:buNone/>
             </a:pPr>
             <a:r>
-              <a:rPr lang="en-US" sz="3000" i="0" u="none" strike="noStrike" cap="none" dirty="0">
+              <a:rPr lang="en-US" sz="3000" b="1" i="0" u="none" strike="noStrike" cap="none" dirty="0">
                 <a:solidFill>
                   <a:srgbClr val="00FFFF"/>
                 </a:solidFill>
@@ -29601,7 +29601,7 @@
               <a:buSzPct val="25000"/>
             </a:pPr>
             <a:r>
-              <a:rPr lang="en-US" sz="3000" i="0" u="none" strike="noStrike" cap="none" dirty="0">
+              <a:rPr lang="en-US" sz="3000" b="1" i="0" u="none" strike="noStrike" cap="none" dirty="0">
                 <a:solidFill>
                   <a:srgbClr val="00FFFF"/>
                 </a:solidFill>
@@ -29613,7 +29613,7 @@
               <a:t>    print('Not equal 6</a:t>
             </a:r>
             <a:r>
-              <a:rPr lang="en-US" sz="3000" dirty="0">
+              <a:rPr lang="en-US" sz="3000" b="1" dirty="0">
                 <a:solidFill>
                   <a:srgbClr val="00FFFF"/>
                 </a:solidFill>
@@ -29624,7 +29624,7 @@
               </a:rPr>
               <a:t>')</a:t>
             </a:r>
-            <a:endParaRPr lang="en-US" sz="3000" i="0" u="none" strike="noStrike" cap="none" dirty="0">
+            <a:endParaRPr lang="en-US" sz="3000" b="1" i="0" u="none" strike="noStrike" cap="none" dirty="0">
               <a:solidFill>
                 <a:srgbClr val="00FFFF"/>
               </a:solidFill>
@@ -29977,7 +29977,7 @@
               <a:buNone/>
             </a:pPr>
             <a:r>
-              <a:rPr lang="en-US" sz="3200" i="0" u="none" strike="noStrike" cap="none" dirty="0">
+              <a:rPr lang="en-US" sz="3200" b="1" i="0" u="none" strike="noStrike" cap="none" dirty="0">
                 <a:solidFill>
                   <a:schemeClr val="lt1"/>
                 </a:solidFill>
@@ -29997,7 +29997,7 @@
               <a:buSzPct val="25000"/>
             </a:pPr>
             <a:r>
-              <a:rPr lang="en-US" sz="3200" i="0" u="none" strike="noStrike" cap="none" dirty="0">
+              <a:rPr lang="en-US" sz="3200" b="1" i="0" u="none" strike="noStrike" cap="none" dirty="0">
                 <a:solidFill>
                   <a:srgbClr val="FF9900"/>
                 </a:solidFill>
@@ -30009,7 +30009,7 @@
               <a:t>print('Before 5</a:t>
             </a:r>
             <a:r>
-              <a:rPr lang="en-US" sz="3200" dirty="0">
+              <a:rPr lang="en-US" sz="3200" b="1" dirty="0">
                 <a:solidFill>
                   <a:srgbClr val="FF9900"/>
                 </a:solidFill>
@@ -30040,7 +30040,7 @@
               <a:buNone/>
             </a:pPr>
             <a:r>
-              <a:rPr lang="en-US" sz="3200" i="0" u="none" strike="noStrike" cap="none" dirty="0">
+              <a:rPr lang="en-US" sz="3200" b="1" i="0" u="none" strike="noStrike" cap="none" dirty="0">
                 <a:solidFill>
                   <a:srgbClr val="00FFFF"/>
                 </a:solidFill>
@@ -30060,7 +30060,7 @@
               <a:buSzPct val="25000"/>
             </a:pPr>
             <a:r>
-              <a:rPr lang="en-US" sz="3200" i="0" u="none" strike="noStrike" cap="none" dirty="0">
+              <a:rPr lang="en-US" sz="3200" b="1" i="0" u="none" strike="noStrike" cap="none" dirty="0">
                 <a:solidFill>
                   <a:srgbClr val="00FFFF"/>
                 </a:solidFill>
@@ -30072,7 +30072,7 @@
               <a:t>    print('Is 5</a:t>
             </a:r>
             <a:r>
-              <a:rPr lang="en-US" sz="3200" dirty="0">
+              <a:rPr lang="en-US" sz="3200" b="1" dirty="0">
                 <a:solidFill>
                   <a:srgbClr val="00FFFF"/>
                 </a:solidFill>
@@ -30092,7 +30092,7 @@
               <a:buSzPct val="25000"/>
             </a:pPr>
             <a:r>
-              <a:rPr lang="en-US" sz="3200" i="0" u="none" strike="noStrike" cap="none" dirty="0">
+              <a:rPr lang="en-US" sz="3200" b="1" i="0" u="none" strike="noStrike" cap="none" dirty="0">
                 <a:solidFill>
                   <a:srgbClr val="00FFFF"/>
                 </a:solidFill>
@@ -30104,7 +30104,7 @@
               <a:t>    print('Is Still 5</a:t>
             </a:r>
             <a:r>
-              <a:rPr lang="en-US" sz="3200" dirty="0">
+              <a:rPr lang="en-US" sz="3200" b="1" dirty="0">
                 <a:solidFill>
                   <a:srgbClr val="00FFFF"/>
                 </a:solidFill>
@@ -30124,7 +30124,7 @@
               <a:buSzPct val="25000"/>
             </a:pPr>
             <a:r>
-              <a:rPr lang="en-US" sz="3200" i="0" u="none" strike="noStrike" cap="none" dirty="0">
+              <a:rPr lang="en-US" sz="3200" b="1" i="0" u="none" strike="noStrike" cap="none" dirty="0">
                 <a:solidFill>
                   <a:srgbClr val="00FFFF"/>
                 </a:solidFill>
@@ -30136,7 +30136,7 @@
               <a:t>    print('Third 5</a:t>
             </a:r>
             <a:r>
-              <a:rPr lang="en-US" sz="3200" dirty="0">
+              <a:rPr lang="en-US" sz="3200" b="1" dirty="0">
                 <a:solidFill>
                   <a:srgbClr val="00FFFF"/>
                 </a:solidFill>
@@ -30156,7 +30156,7 @@
               <a:buSzPct val="25000"/>
             </a:pPr>
             <a:r>
-              <a:rPr lang="en-US" sz="3200" i="0" u="none" strike="noStrike" cap="none" dirty="0">
+              <a:rPr lang="en-US" sz="3200" b="1" i="0" u="none" strike="noStrike" cap="none" dirty="0">
                 <a:solidFill>
                   <a:srgbClr val="FF9900"/>
                 </a:solidFill>
@@ -30168,7 +30168,7 @@
               <a:t>print('Afterwards </a:t>
             </a:r>
             <a:r>
-              <a:rPr lang="en-US" sz="3200" dirty="0">
+              <a:rPr lang="en-US" sz="3200" b="1" dirty="0">
                 <a:solidFill>
                   <a:srgbClr val="FF9900"/>
                 </a:solidFill>
@@ -30179,7 +30179,7 @@
               </a:rPr>
               <a:t>5')</a:t>
             </a:r>
-            <a:endParaRPr lang="en-US" sz="3200" i="0" u="none" strike="noStrike" cap="none" dirty="0">
+            <a:endParaRPr lang="en-US" sz="3200" b="1" i="0" u="none" strike="noStrike" cap="none" dirty="0">
               <a:solidFill>
                 <a:srgbClr val="FF9900"/>
               </a:solidFill>
@@ -30197,7 +30197,7 @@
               <a:buSzPct val="25000"/>
             </a:pPr>
             <a:r>
-              <a:rPr lang="en-US" sz="3200" dirty="0">
+              <a:rPr lang="en-US" sz="3200" b="1" dirty="0">
                 <a:solidFill>
                   <a:srgbClr val="FF9900"/>
                 </a:solidFill>
@@ -30209,7 +30209,7 @@
               <a:t>p</a:t>
             </a:r>
             <a:r>
-              <a:rPr lang="en-US" sz="3200" i="0" u="none" strike="noStrike" cap="none" dirty="0">
+              <a:rPr lang="en-US" sz="3200" b="1" i="0" u="none" strike="noStrike" cap="none" dirty="0">
                 <a:solidFill>
                   <a:srgbClr val="FF9900"/>
                 </a:solidFill>
@@ -30221,7 +30221,7 @@
               <a:t>rint('Before </a:t>
             </a:r>
             <a:r>
-              <a:rPr lang="en-US" sz="3200" dirty="0">
+              <a:rPr lang="en-US" sz="3200" b="1" dirty="0">
                 <a:solidFill>
                   <a:srgbClr val="FF9900"/>
                 </a:solidFill>
@@ -30232,7 +30232,7 @@
               </a:rPr>
               <a:t>6')</a:t>
             </a:r>
-            <a:endParaRPr lang="en-US" sz="3200" i="0" u="none" strike="noStrike" cap="none" dirty="0">
+            <a:endParaRPr lang="en-US" sz="3200" b="1" i="0" u="none" strike="noStrike" cap="none" dirty="0">
               <a:solidFill>
                 <a:srgbClr val="FF9900"/>
               </a:solidFill>
@@ -30261,7 +30261,7 @@
               <a:buNone/>
             </a:pPr>
             <a:r>
-              <a:rPr lang="en-US" sz="3200" i="0" u="none" strike="noStrike" cap="none" dirty="0">
+              <a:rPr lang="en-US" sz="3200" b="1" i="0" u="none" strike="noStrike" cap="none" dirty="0">
                 <a:solidFill>
                   <a:srgbClr val="00FF00"/>
                 </a:solidFill>
@@ -30281,7 +30281,7 @@
               <a:buSzPct val="25000"/>
             </a:pPr>
             <a:r>
-              <a:rPr lang="en-US" sz="3200" i="0" u="none" strike="noStrike" cap="none" dirty="0">
+              <a:rPr lang="en-US" sz="3200" b="1" i="0" u="none" strike="noStrike" cap="none" dirty="0">
                 <a:solidFill>
                   <a:srgbClr val="00FF00"/>
                 </a:solidFill>
@@ -30293,7 +30293,7 @@
               <a:t>    print('Is </a:t>
             </a:r>
             <a:r>
-              <a:rPr lang="en-US" sz="3200" dirty="0">
+              <a:rPr lang="en-US" sz="3200" b="1" dirty="0">
                 <a:solidFill>
                   <a:srgbClr val="00FF00"/>
                 </a:solidFill>
@@ -30304,7 +30304,7 @@
               </a:rPr>
               <a:t>6')</a:t>
             </a:r>
-            <a:endParaRPr lang="en-US" sz="3200" dirty="0">
+            <a:endParaRPr lang="en-US" sz="3200" b="1" dirty="0">
               <a:solidFill>
                 <a:schemeClr val="accent1"/>
               </a:solidFill>
@@ -30322,7 +30322,7 @@
               <a:buSzPct val="25000"/>
             </a:pPr>
             <a:r>
-              <a:rPr lang="en-US" sz="3200" i="0" u="none" strike="noStrike" cap="none" dirty="0">
+              <a:rPr lang="en-US" sz="3200" b="1" i="0" u="none" strike="noStrike" cap="none" dirty="0">
                 <a:solidFill>
                   <a:srgbClr val="00FF00"/>
                 </a:solidFill>
@@ -30334,7 +30334,7 @@
               <a:t>    print('Is Still </a:t>
             </a:r>
             <a:r>
-              <a:rPr lang="en-US" sz="3200" dirty="0">
+              <a:rPr lang="en-US" sz="3200" b="1" dirty="0">
                 <a:solidFill>
                   <a:srgbClr val="00FF00"/>
                 </a:solidFill>
@@ -30345,7 +30345,7 @@
               </a:rPr>
               <a:t>6')</a:t>
             </a:r>
-            <a:endParaRPr lang="en-US" sz="3200" dirty="0">
+            <a:endParaRPr lang="en-US" sz="3200" b="1" dirty="0">
               <a:solidFill>
                 <a:schemeClr val="accent1"/>
               </a:solidFill>
@@ -30363,7 +30363,7 @@
               <a:buSzPct val="25000"/>
             </a:pPr>
             <a:r>
-              <a:rPr lang="en-US" sz="3200" i="0" u="none" strike="noStrike" cap="none" dirty="0">
+              <a:rPr lang="en-US" sz="3200" b="1" i="0" u="none" strike="noStrike" cap="none" dirty="0">
                 <a:solidFill>
                   <a:srgbClr val="00FF00"/>
                 </a:solidFill>
@@ -30375,7 +30375,7 @@
               <a:t>    print('Third </a:t>
             </a:r>
             <a:r>
-              <a:rPr lang="en-US" sz="3200" dirty="0">
+              <a:rPr lang="en-US" sz="3200" b="1" dirty="0">
                 <a:solidFill>
                   <a:srgbClr val="00FF00"/>
                 </a:solidFill>
@@ -30386,7 +30386,7 @@
               </a:rPr>
               <a:t>6')</a:t>
             </a:r>
-            <a:endParaRPr lang="en-US" sz="3200" dirty="0">
+            <a:endParaRPr lang="en-US" sz="3200" b="1" dirty="0">
               <a:solidFill>
                 <a:schemeClr val="accent1"/>
               </a:solidFill>
@@ -30404,7 +30404,7 @@
               <a:buSzPct val="25000"/>
             </a:pPr>
             <a:r>
-              <a:rPr lang="en-US" sz="3200" dirty="0">
+              <a:rPr lang="en-US" sz="3200" b="1" dirty="0">
                 <a:solidFill>
                   <a:srgbClr val="FF9900"/>
                 </a:solidFill>
@@ -30416,7 +30416,7 @@
               <a:t>p</a:t>
             </a:r>
             <a:r>
-              <a:rPr lang="en-US" sz="3200" i="0" u="none" strike="noStrike" cap="none" dirty="0">
+              <a:rPr lang="en-US" sz="3200" b="1" i="0" u="none" strike="noStrike" cap="none" dirty="0">
                 <a:solidFill>
                   <a:srgbClr val="FF9900"/>
                 </a:solidFill>
@@ -30428,7 +30428,7 @@
               <a:t>rint('Afterwards 6</a:t>
             </a:r>
             <a:r>
-              <a:rPr lang="en-US" sz="3200" dirty="0">
+              <a:rPr lang="en-US" sz="3200" b="1" dirty="0">
                 <a:solidFill>
                   <a:srgbClr val="FF9900"/>
                 </a:solidFill>
@@ -30439,7 +30439,7 @@
               </a:rPr>
               <a:t>')</a:t>
             </a:r>
-            <a:endParaRPr lang="en-US" sz="3200" i="0" u="none" strike="noStrike" cap="none" dirty="0">
+            <a:endParaRPr lang="en-US" sz="3200" b="1" i="0" u="none" strike="noStrike" cap="none" dirty="0">
               <a:solidFill>
                 <a:srgbClr val="FF9900"/>
               </a:solidFill>
@@ -32114,10 +32114,29 @@
                 <a:cs typeface="Courier"/>
                 <a:sym typeface="Courier New"/>
               </a:rPr>
-              <a:t> </a:t>
-            </a:r>
-            <a:r>
-              <a:rPr lang="en-US" sz="3200" i="0" u="none" strike="noStrike" cap="none" dirty="0">
+              <a:t> x = 5</a:t>
+            </a:r>
+          </a:p>
+          <a:p>
+            <a:pPr marL="0" marR="0" lvl="0" indent="0" algn="l" rtl="0">
+              <a:lnSpc>
+                <a:spcPct val="100000"/>
+              </a:lnSpc>
+              <a:spcBef>
+                <a:spcPts val="0"/>
+              </a:spcBef>
+              <a:spcAft>
+                <a:spcPts val="0"/>
+              </a:spcAft>
+              <a:buClr>
+                <a:schemeClr val="lt1"/>
+              </a:buClr>
+              <a:buSzPct val="25000"/>
+              <a:buFont typeface="Cabin"/>
+              <a:buNone/>
+            </a:pPr>
+            <a:r>
+              <a:rPr lang="en-US" sz="3200" b="1" i="0" u="none" strike="noStrike" cap="none" dirty="0">
                 <a:solidFill>
                   <a:schemeClr val="lt1"/>
                 </a:solidFill>
@@ -32126,29 +32145,18 @@
                 <a:cs typeface="Courier"/>
                 <a:sym typeface="Courier New"/>
               </a:rPr>
-              <a:t>x = 5</a:t>
-            </a:r>
-          </a:p>
-          <a:p>
-            <a:pPr marL="0" marR="0" lvl="0" indent="0" algn="l" rtl="0">
-              <a:lnSpc>
-                <a:spcPct val="100000"/>
-              </a:lnSpc>
-              <a:spcBef>
-                <a:spcPts val="0"/>
-              </a:spcBef>
-              <a:spcAft>
-                <a:spcPts val="0"/>
-              </a:spcAft>
+              <a:t> if x &gt; 2 :</a:t>
+            </a:r>
+          </a:p>
+          <a:p>
+            <a:pPr lvl="0">
               <a:buClr>
                 <a:schemeClr val="lt1"/>
               </a:buClr>
               <a:buSzPct val="25000"/>
-              <a:buFont typeface="Cabin"/>
-              <a:buNone/>
-            </a:pPr>
-            <a:r>
-              <a:rPr lang="en-US" sz="3200" i="0" u="none" strike="noStrike" cap="none" dirty="0">
+            </a:pPr>
+            <a:r>
+              <a:rPr lang="en-US" sz="3200" b="1" i="0" u="none" strike="noStrike" cap="none" dirty="0">
                 <a:solidFill>
                   <a:schemeClr val="lt1"/>
                 </a:solidFill>
@@ -32157,18 +32165,10 @@
                 <a:cs typeface="Courier"/>
                 <a:sym typeface="Courier New"/>
               </a:rPr>
-              <a:t> if x &gt; 2 :</a:t>
-            </a:r>
-          </a:p>
-          <a:p>
-            <a:pPr lvl="0">
-              <a:buClr>
-                <a:schemeClr val="lt1"/>
-              </a:buClr>
-              <a:buSzPct val="25000"/>
-            </a:pPr>
-            <a:r>
-              <a:rPr lang="en-US" sz="3200" i="0" u="none" strike="noStrike" cap="none" dirty="0">
+              <a:t>     print('Bigger than </a:t>
+            </a:r>
+            <a:r>
+              <a:rPr lang="en-US" sz="3200" b="1" dirty="0">
                 <a:solidFill>
                   <a:schemeClr val="lt1"/>
                 </a:solidFill>
@@ -32177,21 +32177,9 @@
                 <a:cs typeface="Courier"/>
                 <a:sym typeface="Courier New"/>
               </a:rPr>
-              <a:t>     print('Bigger than </a:t>
-            </a:r>
-            <a:r>
-              <a:rPr lang="en-US" sz="3200" dirty="0">
-                <a:solidFill>
-                  <a:schemeClr val="lt1"/>
-                </a:solidFill>
-                <a:latin typeface="Courier"/>
-                <a:ea typeface="Courier"/>
-                <a:cs typeface="Courier"/>
-                <a:sym typeface="Courier New"/>
-              </a:rPr>
               <a:t>2')</a:t>
             </a:r>
-            <a:endParaRPr lang="en-US" sz="3200" i="0" u="none" strike="noStrike" cap="none" dirty="0">
+            <a:endParaRPr lang="en-US" sz="3200" b="1" i="0" u="none" strike="noStrike" cap="none" dirty="0">
               <a:solidFill>
                 <a:schemeClr val="lt1"/>
               </a:solidFill>
@@ -32209,7 +32197,7 @@
               <a:buSzPct val="25000"/>
             </a:pPr>
             <a:r>
-              <a:rPr lang="en-US" sz="3200" i="0" u="none" strike="noStrike" cap="none" dirty="0">
+              <a:rPr lang="en-US" sz="3200" b="1" i="0" u="none" strike="noStrike" cap="none" dirty="0">
                 <a:solidFill>
                   <a:schemeClr val="lt1"/>
                 </a:solidFill>
@@ -32221,7 +32209,7 @@
               <a:t>     print('Still </a:t>
             </a:r>
             <a:r>
-              <a:rPr lang="en-US" sz="3200" dirty="0">
+              <a:rPr lang="en-US" sz="3200" b="1" dirty="0">
                 <a:solidFill>
                   <a:schemeClr val="lt1"/>
                 </a:solidFill>
@@ -32232,7 +32220,7 @@
               </a:rPr>
               <a:t>bigger')</a:t>
             </a:r>
-            <a:endParaRPr lang="en-US" sz="3200" i="0" u="none" strike="noStrike" cap="none" dirty="0">
+            <a:endParaRPr lang="en-US" sz="3200" b="1" i="0" u="none" strike="noStrike" cap="none" dirty="0">
               <a:solidFill>
                 <a:schemeClr val="lt1"/>
               </a:solidFill>
@@ -32250,7 +32238,7 @@
               <a:buSzPct val="25000"/>
             </a:pPr>
             <a:r>
-              <a:rPr lang="en-US" sz="3200" i="0" u="none" strike="noStrike" cap="none" dirty="0">
+              <a:rPr lang="en-US" sz="3200" b="1" i="0" u="none" strike="noStrike" cap="none" dirty="0">
                 <a:solidFill>
                   <a:schemeClr val="lt1"/>
                 </a:solidFill>
@@ -32262,7 +32250,7 @@
               <a:t> print('Done with </a:t>
             </a:r>
             <a:r>
-              <a:rPr lang="en-US" sz="3200" dirty="0">
+              <a:rPr lang="en-US" sz="3200" b="1" dirty="0">
                 <a:solidFill>
                   <a:schemeClr val="lt1"/>
                 </a:solidFill>
@@ -32273,7 +32261,7 @@
               </a:rPr>
               <a:t>2')</a:t>
             </a:r>
-            <a:endParaRPr lang="en-US" sz="3200" i="0" u="none" strike="noStrike" cap="none" dirty="0">
+            <a:endParaRPr lang="en-US" sz="3200" b="1" i="0" u="none" strike="noStrike" cap="none" dirty="0">
               <a:solidFill>
                 <a:schemeClr val="lt1"/>
               </a:solidFill>
@@ -32296,7 +32284,7 @@
               </a:spcAft>
               <a:buNone/>
             </a:pPr>
-            <a:endParaRPr sz="3200" i="0" u="none" strike="noStrike" cap="none" dirty="0">
+            <a:endParaRPr sz="3200" b="1" i="0" u="none" strike="noStrike" cap="none" dirty="0">
               <a:solidFill>
                 <a:schemeClr val="lt1"/>
               </a:solidFill>
@@ -32325,7 +32313,7 @@
               <a:buNone/>
             </a:pPr>
             <a:r>
-              <a:rPr lang="en-US" sz="3200" i="0" u="none" strike="noStrike" cap="none" dirty="0">
+              <a:rPr lang="en-US" sz="3200" b="1" i="0" u="none" strike="noStrike" cap="none" dirty="0">
                 <a:solidFill>
                   <a:schemeClr val="lt1"/>
                 </a:solidFill>
@@ -32337,7 +32325,7 @@
               <a:t> for </a:t>
             </a:r>
             <a:r>
-              <a:rPr lang="en-US" sz="3200" i="0" u="none" strike="noStrike" cap="none" dirty="0" err="1">
+              <a:rPr lang="en-US" sz="3200" b="1" i="0" u="none" strike="noStrike" cap="none" dirty="0" err="1">
                 <a:solidFill>
                   <a:schemeClr val="lt1"/>
                 </a:solidFill>
@@ -32349,7 +32337,7 @@
               <a:t>i</a:t>
             </a:r>
             <a:r>
-              <a:rPr lang="en-US" sz="3200" i="0" u="none" strike="noStrike" cap="none" dirty="0">
+              <a:rPr lang="en-US" sz="3200" b="1" i="0" u="none" strike="noStrike" cap="none" dirty="0">
                 <a:solidFill>
                   <a:schemeClr val="lt1"/>
                 </a:solidFill>
@@ -32380,7 +32368,7 @@
               <a:buNone/>
             </a:pPr>
             <a:r>
-              <a:rPr lang="en-US" sz="3200" i="0" u="none" strike="noStrike" cap="none" dirty="0">
+              <a:rPr lang="en-US" sz="3200" b="1" i="0" u="none" strike="noStrike" cap="none" dirty="0">
                 <a:solidFill>
                   <a:schemeClr val="lt1"/>
                 </a:solidFill>
@@ -32392,7 +32380,7 @@
               <a:t>     print(</a:t>
             </a:r>
             <a:r>
-              <a:rPr lang="en-US" sz="3200" i="0" u="none" strike="noStrike" cap="none" dirty="0" err="1">
+              <a:rPr lang="en-US" sz="3200" b="1" i="0" u="none" strike="noStrike" cap="none" dirty="0" err="1">
                 <a:solidFill>
                   <a:schemeClr val="lt1"/>
                 </a:solidFill>
@@ -32404,7 +32392,7 @@
               <a:t>i</a:t>
             </a:r>
             <a:r>
-              <a:rPr lang="en-US" sz="3200" i="0" u="none" strike="noStrike" cap="none" dirty="0">
+              <a:rPr lang="en-US" sz="3200" b="1" i="0" u="none" strike="noStrike" cap="none" dirty="0">
                 <a:solidFill>
                   <a:schemeClr val="lt1"/>
                 </a:solidFill>
@@ -32435,7 +32423,7 @@
               <a:buNone/>
             </a:pPr>
             <a:r>
-              <a:rPr lang="en-US" sz="3200" i="0" u="none" strike="noStrike" cap="none" dirty="0">
+              <a:rPr lang="en-US" sz="3200" b="1" i="0" u="none" strike="noStrike" cap="none" dirty="0">
                 <a:solidFill>
                   <a:schemeClr val="lt1"/>
                 </a:solidFill>
@@ -32447,7 +32435,7 @@
               <a:t>     if </a:t>
             </a:r>
             <a:r>
-              <a:rPr lang="en-US" sz="3200" i="0" u="none" strike="noStrike" cap="none" dirty="0" err="1">
+              <a:rPr lang="en-US" sz="3200" b="1" i="0" u="none" strike="noStrike" cap="none" dirty="0" err="1">
                 <a:solidFill>
                   <a:schemeClr val="lt1"/>
                 </a:solidFill>
@@ -32459,7 +32447,7 @@
               <a:t>i</a:t>
             </a:r>
             <a:r>
-              <a:rPr lang="en-US" sz="3200" i="0" u="none" strike="noStrike" cap="none" dirty="0">
+              <a:rPr lang="en-US" sz="3200" b="1" i="0" u="none" strike="noStrike" cap="none" dirty="0">
                 <a:solidFill>
                   <a:schemeClr val="lt1"/>
                 </a:solidFill>
@@ -32479,7 +32467,7 @@
               <a:buSzPct val="25000"/>
             </a:pPr>
             <a:r>
-              <a:rPr lang="en-US" sz="3200" i="0" u="none" strike="noStrike" cap="none" dirty="0">
+              <a:rPr lang="en-US" sz="3200" b="1" i="0" u="none" strike="noStrike" cap="none" dirty="0">
                 <a:solidFill>
                   <a:schemeClr val="lt1"/>
                 </a:solidFill>
@@ -32491,7 +32479,7 @@
               <a:t>         print('Bigger than </a:t>
             </a:r>
             <a:r>
-              <a:rPr lang="en-US" sz="3200" dirty="0">
+              <a:rPr lang="en-US" sz="3200" b="1" dirty="0">
                 <a:solidFill>
                   <a:schemeClr val="lt1"/>
                 </a:solidFill>
@@ -32502,7 +32490,7 @@
               </a:rPr>
               <a:t>2')</a:t>
             </a:r>
-            <a:endParaRPr lang="en-US" sz="3200" i="0" u="none" strike="noStrike" cap="none" dirty="0">
+            <a:endParaRPr lang="en-US" sz="3200" b="1" i="0" u="none" strike="noStrike" cap="none" dirty="0">
               <a:solidFill>
                 <a:schemeClr val="lt1"/>
               </a:solidFill>
@@ -32531,7 +32519,7 @@
               <a:buNone/>
             </a:pPr>
             <a:r>
-              <a:rPr lang="en-US" sz="3200" i="0" u="none" strike="noStrike" cap="none" dirty="0">
+              <a:rPr lang="en-US" sz="3200" b="1" i="0" u="none" strike="noStrike" cap="none" dirty="0">
                 <a:solidFill>
                   <a:schemeClr val="lt1"/>
                 </a:solidFill>
@@ -32543,7 +32531,7 @@
               <a:t>     print('Done with </a:t>
             </a:r>
             <a:r>
-              <a:rPr lang="en-US" sz="3200" i="0" u="none" strike="noStrike" cap="none" dirty="0" err="1">
+              <a:rPr lang="en-US" sz="3200" b="1" i="0" u="none" strike="noStrike" cap="none" dirty="0" err="1">
                 <a:solidFill>
                   <a:schemeClr val="lt1"/>
                 </a:solidFill>
@@ -32555,7 +32543,7 @@
               <a:t>i</a:t>
             </a:r>
             <a:r>
-              <a:rPr lang="en-US" sz="3200" i="0" u="none" strike="noStrike" cap="none" dirty="0">
+              <a:rPr lang="en-US" sz="3200" b="1" i="0" u="none" strike="noStrike" cap="none" dirty="0">
                 <a:solidFill>
                   <a:schemeClr val="lt1"/>
                 </a:solidFill>
@@ -32567,7 +32555,7 @@
               <a:t>', </a:t>
             </a:r>
             <a:r>
-              <a:rPr lang="en-US" sz="3200" i="0" u="none" strike="noStrike" cap="none" dirty="0" err="1">
+              <a:rPr lang="en-US" sz="3200" b="1" i="0" u="none" strike="noStrike" cap="none" dirty="0" err="1">
                 <a:solidFill>
                   <a:schemeClr val="lt1"/>
                 </a:solidFill>
@@ -32579,7 +32567,7 @@
               <a:t>i</a:t>
             </a:r>
             <a:r>
-              <a:rPr lang="en-US" sz="3200" i="0" u="none" strike="noStrike" cap="none" dirty="0">
+              <a:rPr lang="en-US" sz="3200" b="1" i="0" u="none" strike="noStrike" cap="none" dirty="0">
                 <a:solidFill>
                   <a:schemeClr val="lt1"/>
                 </a:solidFill>
@@ -32610,7 +32598,7 @@
               <a:buNone/>
             </a:pPr>
             <a:r>
-              <a:rPr lang="en-US" sz="3200" dirty="0">
+              <a:rPr lang="en-US" sz="3200" b="1" dirty="0">
                 <a:solidFill>
                   <a:schemeClr val="lt1"/>
                 </a:solidFill>
@@ -33160,7 +33148,10 @@
               </a:spcAft>
               <a:buNone/>
             </a:pPr>
-            <a:endParaRPr/>
+            <a:endParaRPr b="1">
+              <a:latin typeface="Courier New" panose="02070309020205020404" pitchFamily="49" charset="0"/>
+              <a:cs typeface="Courier New" panose="02070309020205020404" pitchFamily="49" charset="0"/>
+            </a:endParaRPr>
           </a:p>
         </p:txBody>
       </p:sp>
@@ -33207,7 +33198,10 @@
               </a:spcAft>
               <a:buNone/>
             </a:pPr>
-            <a:endParaRPr/>
+            <a:endParaRPr b="1">
+              <a:latin typeface="Courier New" panose="02070309020205020404" pitchFamily="49" charset="0"/>
+              <a:cs typeface="Courier New" panose="02070309020205020404" pitchFamily="49" charset="0"/>
+            </a:endParaRPr>
           </a:p>
         </p:txBody>
       </p:sp>
@@ -33254,7 +33248,10 @@
               </a:spcAft>
               <a:buNone/>
             </a:pPr>
-            <a:endParaRPr/>
+            <a:endParaRPr b="1">
+              <a:latin typeface="Courier New" panose="02070309020205020404" pitchFamily="49" charset="0"/>
+              <a:cs typeface="Courier New" panose="02070309020205020404" pitchFamily="49" charset="0"/>
+            </a:endParaRPr>
           </a:p>
         </p:txBody>
       </p:sp>
@@ -33305,13 +33302,13 @@
               <a:buNone/>
             </a:pPr>
             <a:r>
-              <a:rPr lang="en-US" sz="3200" i="0" u="none" strike="noStrike" cap="none" dirty="0">
+              <a:rPr lang="en-US" sz="3200" b="1" i="0" u="none" strike="noStrike" cap="none" dirty="0">
                 <a:solidFill>
                   <a:schemeClr val="lt1"/>
                 </a:solidFill>
-                <a:latin typeface="Courier"/>
-                <a:ea typeface="Courier"/>
-                <a:cs typeface="Courier"/>
+                <a:latin typeface="Courier New" panose="02070309020205020404" pitchFamily="49" charset="0"/>
+                <a:ea typeface="Courier"/>
+                <a:cs typeface="Courier New" panose="02070309020205020404" pitchFamily="49" charset="0"/>
                 <a:sym typeface="Courier New"/>
               </a:rPr>
               <a:t>x = 5</a:t>
@@ -33336,13 +33333,13 @@
               <a:buNone/>
             </a:pPr>
             <a:r>
-              <a:rPr lang="en-US" sz="3200" i="0" u="none" strike="noStrike" cap="none" dirty="0">
+              <a:rPr lang="en-US" sz="3200" b="1" i="0" u="none" strike="noStrike" cap="none" dirty="0">
                 <a:solidFill>
                   <a:schemeClr val="lt1"/>
                 </a:solidFill>
-                <a:latin typeface="Courier"/>
-                <a:ea typeface="Courier"/>
-                <a:cs typeface="Courier"/>
+                <a:latin typeface="Courier New" panose="02070309020205020404" pitchFamily="49" charset="0"/>
+                <a:ea typeface="Courier"/>
+                <a:cs typeface="Courier New" panose="02070309020205020404" pitchFamily="49" charset="0"/>
                 <a:sym typeface="Courier New"/>
               </a:rPr>
               <a:t>if x &gt; 2 :</a:t>
@@ -33356,36 +33353,36 @@
               <a:buSzPct val="25000"/>
             </a:pPr>
             <a:r>
-              <a:rPr lang="en-US" sz="3200" i="0" u="none" strike="noStrike" cap="none" dirty="0">
+              <a:rPr lang="en-US" sz="3200" b="1" i="0" u="none" strike="noStrike" cap="none" dirty="0">
                 <a:solidFill>
                   <a:schemeClr val="lt1"/>
                 </a:solidFill>
-                <a:latin typeface="Courier"/>
-                <a:ea typeface="Courier"/>
-                <a:cs typeface="Courier"/>
+                <a:latin typeface="Courier New" panose="02070309020205020404" pitchFamily="49" charset="0"/>
+                <a:ea typeface="Courier"/>
+                <a:cs typeface="Courier New" panose="02070309020205020404" pitchFamily="49" charset="0"/>
                 <a:sym typeface="Courier New"/>
               </a:rPr>
               <a:t>    print('Bigger than </a:t>
             </a:r>
             <a:r>
-              <a:rPr lang="en-US" sz="3200" dirty="0">
+              <a:rPr lang="en-US" sz="3200" b="1" dirty="0">
                 <a:solidFill>
                   <a:schemeClr val="lt1"/>
                 </a:solidFill>
-                <a:latin typeface="Courier"/>
-                <a:ea typeface="Courier"/>
-                <a:cs typeface="Courier"/>
+                <a:latin typeface="Courier New" panose="02070309020205020404" pitchFamily="49" charset="0"/>
+                <a:ea typeface="Courier"/>
+                <a:cs typeface="Courier New" panose="02070309020205020404" pitchFamily="49" charset="0"/>
                 <a:sym typeface="Courier New"/>
               </a:rPr>
               <a:t>2')</a:t>
             </a:r>
-            <a:endParaRPr lang="en-US" sz="3200" i="0" u="none" strike="noStrike" cap="none" dirty="0">
+            <a:endParaRPr lang="en-US" sz="3200" b="1" i="0" u="none" strike="noStrike" cap="none" dirty="0">
               <a:solidFill>
                 <a:schemeClr val="lt1"/>
               </a:solidFill>
-              <a:latin typeface="Courier"/>
+              <a:latin typeface="Courier New" panose="02070309020205020404" pitchFamily="49" charset="0"/>
               <a:ea typeface="Courier"/>
-              <a:cs typeface="Courier"/>
+              <a:cs typeface="Courier New" panose="02070309020205020404" pitchFamily="49" charset="0"/>
               <a:sym typeface="Courier New"/>
             </a:endParaRPr>
           </a:p>
@@ -33397,36 +33394,36 @@
               <a:buSzPct val="25000"/>
             </a:pPr>
             <a:r>
-              <a:rPr lang="en-US" sz="3200" i="0" u="none" strike="noStrike" cap="none" dirty="0">
+              <a:rPr lang="en-US" sz="3200" b="1" i="0" u="none" strike="noStrike" cap="none" dirty="0">
                 <a:solidFill>
                   <a:schemeClr val="lt1"/>
                 </a:solidFill>
-                <a:latin typeface="Courier"/>
-                <a:ea typeface="Courier"/>
-                <a:cs typeface="Courier"/>
+                <a:latin typeface="Courier New" panose="02070309020205020404" pitchFamily="49" charset="0"/>
+                <a:ea typeface="Courier"/>
+                <a:cs typeface="Courier New" panose="02070309020205020404" pitchFamily="49" charset="0"/>
                 <a:sym typeface="Courier New"/>
               </a:rPr>
               <a:t>    print('Still </a:t>
             </a:r>
             <a:r>
-              <a:rPr lang="en-US" sz="3200" dirty="0">
+              <a:rPr lang="en-US" sz="3200" b="1" dirty="0">
                 <a:solidFill>
                   <a:schemeClr val="lt1"/>
                 </a:solidFill>
-                <a:latin typeface="Courier"/>
-                <a:ea typeface="Courier"/>
-                <a:cs typeface="Courier"/>
+                <a:latin typeface="Courier New" panose="02070309020205020404" pitchFamily="49" charset="0"/>
+                <a:ea typeface="Courier"/>
+                <a:cs typeface="Courier New" panose="02070309020205020404" pitchFamily="49" charset="0"/>
                 <a:sym typeface="Courier New"/>
               </a:rPr>
               <a:t>bigger')</a:t>
             </a:r>
-            <a:endParaRPr lang="en-US" sz="3200" i="0" u="none" strike="noStrike" cap="none" dirty="0">
+            <a:endParaRPr lang="en-US" sz="3200" b="1" i="0" u="none" strike="noStrike" cap="none" dirty="0">
               <a:solidFill>
                 <a:schemeClr val="lt1"/>
               </a:solidFill>
-              <a:latin typeface="Courier"/>
+              <a:latin typeface="Courier New" panose="02070309020205020404" pitchFamily="49" charset="0"/>
               <a:ea typeface="Courier"/>
-              <a:cs typeface="Courier"/>
+              <a:cs typeface="Courier New" panose="02070309020205020404" pitchFamily="49" charset="0"/>
               <a:sym typeface="Courier New"/>
             </a:endParaRPr>
           </a:p>
@@ -33438,36 +33435,36 @@
               <a:buSzPct val="25000"/>
             </a:pPr>
             <a:r>
-              <a:rPr lang="en-US" sz="3200" i="0" u="none" strike="noStrike" cap="none" dirty="0">
+              <a:rPr lang="en-US" sz="3200" b="1" i="0" u="none" strike="noStrike" cap="none" dirty="0">
                 <a:solidFill>
                   <a:schemeClr val="lt1"/>
                 </a:solidFill>
-                <a:latin typeface="Courier"/>
-                <a:ea typeface="Courier"/>
-                <a:cs typeface="Courier"/>
+                <a:latin typeface="Courier New" panose="02070309020205020404" pitchFamily="49" charset="0"/>
+                <a:ea typeface="Courier"/>
+                <a:cs typeface="Courier New" panose="02070309020205020404" pitchFamily="49" charset="0"/>
                 <a:sym typeface="Courier New"/>
               </a:rPr>
               <a:t>print('Done with </a:t>
             </a:r>
             <a:r>
-              <a:rPr lang="en-US" sz="3200" dirty="0">
+              <a:rPr lang="en-US" sz="3200" b="1" dirty="0">
                 <a:solidFill>
                   <a:schemeClr val="lt1"/>
                 </a:solidFill>
-                <a:latin typeface="Courier"/>
-                <a:ea typeface="Courier"/>
-                <a:cs typeface="Courier"/>
+                <a:latin typeface="Courier New" panose="02070309020205020404" pitchFamily="49" charset="0"/>
+                <a:ea typeface="Courier"/>
+                <a:cs typeface="Courier New" panose="02070309020205020404" pitchFamily="49" charset="0"/>
                 <a:sym typeface="Courier New"/>
               </a:rPr>
               <a:t>2')</a:t>
             </a:r>
-            <a:endParaRPr lang="en-US" sz="3200" i="0" u="none" strike="noStrike" cap="none" dirty="0">
+            <a:endParaRPr lang="en-US" sz="3200" b="1" i="0" u="none" strike="noStrike" cap="none" dirty="0">
               <a:solidFill>
                 <a:schemeClr val="lt1"/>
               </a:solidFill>
-              <a:latin typeface="Courier"/>
+              <a:latin typeface="Courier New" panose="02070309020205020404" pitchFamily="49" charset="0"/>
               <a:ea typeface="Courier"/>
-              <a:cs typeface="Courier"/>
+              <a:cs typeface="Courier New" panose="02070309020205020404" pitchFamily="49" charset="0"/>
               <a:sym typeface="Courier New"/>
             </a:endParaRPr>
           </a:p>
@@ -33484,13 +33481,13 @@
               </a:spcAft>
               <a:buNone/>
             </a:pPr>
-            <a:endParaRPr sz="3200" i="0" u="none" strike="noStrike" cap="none" dirty="0">
+            <a:endParaRPr sz="3200" b="1" i="0" u="none" strike="noStrike" cap="none" dirty="0">
               <a:solidFill>
                 <a:schemeClr val="lt1"/>
               </a:solidFill>
-              <a:latin typeface="Courier"/>
+              <a:latin typeface="Courier New" panose="02070309020205020404" pitchFamily="49" charset="0"/>
               <a:ea typeface="Courier"/>
-              <a:cs typeface="Courier"/>
+              <a:cs typeface="Courier New" panose="02070309020205020404" pitchFamily="49" charset="0"/>
               <a:sym typeface="Courier New"/>
             </a:endParaRPr>
           </a:p>
@@ -33513,37 +33510,37 @@
               <a:buNone/>
             </a:pPr>
             <a:r>
-              <a:rPr lang="en-US" sz="3200" i="0" u="none" strike="noStrike" cap="none" dirty="0">
+              <a:rPr lang="en-US" sz="3200" b="1" i="0" u="none" strike="noStrike" cap="none" dirty="0">
                 <a:solidFill>
                   <a:schemeClr val="lt1"/>
                 </a:solidFill>
-                <a:latin typeface="Courier"/>
-                <a:ea typeface="Courier"/>
-                <a:cs typeface="Courier"/>
+                <a:latin typeface="Courier New" panose="02070309020205020404" pitchFamily="49" charset="0"/>
+                <a:ea typeface="Courier"/>
+                <a:cs typeface="Courier New" panose="02070309020205020404" pitchFamily="49" charset="0"/>
                 <a:sym typeface="Courier New"/>
               </a:rPr>
               <a:t>for </a:t>
             </a:r>
             <a:r>
-              <a:rPr lang="en-US" sz="3200" i="0" u="none" strike="noStrike" cap="none" dirty="0" err="1">
+              <a:rPr lang="en-US" sz="3200" b="1" i="0" u="none" strike="noStrike" cap="none" dirty="0" err="1">
                 <a:solidFill>
                   <a:schemeClr val="lt1"/>
                 </a:solidFill>
-                <a:latin typeface="Courier"/>
-                <a:ea typeface="Courier"/>
-                <a:cs typeface="Courier"/>
+                <a:latin typeface="Courier New" panose="02070309020205020404" pitchFamily="49" charset="0"/>
+                <a:ea typeface="Courier"/>
+                <a:cs typeface="Courier New" panose="02070309020205020404" pitchFamily="49" charset="0"/>
                 <a:sym typeface="Courier New"/>
               </a:rPr>
               <a:t>i</a:t>
             </a:r>
             <a:r>
-              <a:rPr lang="en-US" sz="3200" i="0" u="none" strike="noStrike" cap="none" dirty="0">
+              <a:rPr lang="en-US" sz="3200" b="1" i="0" u="none" strike="noStrike" cap="none" dirty="0">
                 <a:solidFill>
                   <a:schemeClr val="lt1"/>
                 </a:solidFill>
-                <a:latin typeface="Courier"/>
-                <a:ea typeface="Courier"/>
-                <a:cs typeface="Courier"/>
+                <a:latin typeface="Courier New" panose="02070309020205020404" pitchFamily="49" charset="0"/>
+                <a:ea typeface="Courier"/>
+                <a:cs typeface="Courier New" panose="02070309020205020404" pitchFamily="49" charset="0"/>
                 <a:sym typeface="Courier New"/>
               </a:rPr>
               <a:t> in range(5) :</a:t>
@@ -33568,37 +33565,37 @@
               <a:buNone/>
             </a:pPr>
             <a:r>
-              <a:rPr lang="en-US" sz="3200" i="0" u="none" strike="noStrike" cap="none" dirty="0">
+              <a:rPr lang="en-US" sz="3200" b="1" i="0" u="none" strike="noStrike" cap="none" dirty="0">
                 <a:solidFill>
                   <a:schemeClr val="lt1"/>
                 </a:solidFill>
-                <a:latin typeface="Courier"/>
-                <a:ea typeface="Courier"/>
-                <a:cs typeface="Courier"/>
+                <a:latin typeface="Courier New" panose="02070309020205020404" pitchFamily="49" charset="0"/>
+                <a:ea typeface="Courier"/>
+                <a:cs typeface="Courier New" panose="02070309020205020404" pitchFamily="49" charset="0"/>
                 <a:sym typeface="Courier New"/>
               </a:rPr>
               <a:t>    print(</a:t>
             </a:r>
             <a:r>
-              <a:rPr lang="en-US" sz="3200" i="0" u="none" strike="noStrike" cap="none" dirty="0" err="1">
+              <a:rPr lang="en-US" sz="3200" b="1" i="0" u="none" strike="noStrike" cap="none" dirty="0" err="1">
                 <a:solidFill>
                   <a:schemeClr val="lt1"/>
                 </a:solidFill>
-                <a:latin typeface="Courier"/>
-                <a:ea typeface="Courier"/>
-                <a:cs typeface="Courier"/>
+                <a:latin typeface="Courier New" panose="02070309020205020404" pitchFamily="49" charset="0"/>
+                <a:ea typeface="Courier"/>
+                <a:cs typeface="Courier New" panose="02070309020205020404" pitchFamily="49" charset="0"/>
                 <a:sym typeface="Courier New"/>
               </a:rPr>
               <a:t>i</a:t>
             </a:r>
             <a:r>
-              <a:rPr lang="en-US" sz="3200" i="0" u="none" strike="noStrike" cap="none" dirty="0">
+              <a:rPr lang="en-US" sz="3200" b="1" i="0" u="none" strike="noStrike" cap="none" dirty="0">
                 <a:solidFill>
                   <a:schemeClr val="lt1"/>
                 </a:solidFill>
-                <a:latin typeface="Courier"/>
-                <a:ea typeface="Courier"/>
-                <a:cs typeface="Courier"/>
+                <a:latin typeface="Courier New" panose="02070309020205020404" pitchFamily="49" charset="0"/>
+                <a:ea typeface="Courier"/>
+                <a:cs typeface="Courier New" panose="02070309020205020404" pitchFamily="49" charset="0"/>
                 <a:sym typeface="Courier New"/>
               </a:rPr>
               <a:t>)</a:t>
@@ -33623,37 +33620,37 @@
               <a:buNone/>
             </a:pPr>
             <a:r>
-              <a:rPr lang="en-US" sz="3200" i="0" u="none" strike="noStrike" cap="none" dirty="0">
+              <a:rPr lang="en-US" sz="3200" b="1" i="0" u="none" strike="noStrike" cap="none" dirty="0">
                 <a:solidFill>
                   <a:schemeClr val="lt1"/>
                 </a:solidFill>
-                <a:latin typeface="Courier"/>
-                <a:ea typeface="Courier"/>
-                <a:cs typeface="Courier"/>
+                <a:latin typeface="Courier New" panose="02070309020205020404" pitchFamily="49" charset="0"/>
+                <a:ea typeface="Courier"/>
+                <a:cs typeface="Courier New" panose="02070309020205020404" pitchFamily="49" charset="0"/>
                 <a:sym typeface="Courier New"/>
               </a:rPr>
               <a:t>    if </a:t>
             </a:r>
             <a:r>
-              <a:rPr lang="en-US" sz="3200" i="0" u="none" strike="noStrike" cap="none" dirty="0" err="1">
+              <a:rPr lang="en-US" sz="3200" b="1" i="0" u="none" strike="noStrike" cap="none" dirty="0" err="1">
                 <a:solidFill>
                   <a:schemeClr val="lt1"/>
                 </a:solidFill>
-                <a:latin typeface="Courier"/>
-                <a:ea typeface="Courier"/>
-                <a:cs typeface="Courier"/>
+                <a:latin typeface="Courier New" panose="02070309020205020404" pitchFamily="49" charset="0"/>
+                <a:ea typeface="Courier"/>
+                <a:cs typeface="Courier New" panose="02070309020205020404" pitchFamily="49" charset="0"/>
                 <a:sym typeface="Courier New"/>
               </a:rPr>
               <a:t>i</a:t>
             </a:r>
             <a:r>
-              <a:rPr lang="en-US" sz="3200" i="0" u="none" strike="noStrike" cap="none" dirty="0">
+              <a:rPr lang="en-US" sz="3200" b="1" i="0" u="none" strike="noStrike" cap="none" dirty="0">
                 <a:solidFill>
                   <a:schemeClr val="lt1"/>
                 </a:solidFill>
-                <a:latin typeface="Courier"/>
-                <a:ea typeface="Courier"/>
-                <a:cs typeface="Courier"/>
+                <a:latin typeface="Courier New" panose="02070309020205020404" pitchFamily="49" charset="0"/>
+                <a:ea typeface="Courier"/>
+                <a:cs typeface="Courier New" panose="02070309020205020404" pitchFamily="49" charset="0"/>
                 <a:sym typeface="Courier New"/>
               </a:rPr>
               <a:t> &gt; 2 : </a:t>
@@ -33667,36 +33664,36 @@
               <a:buSzPct val="25000"/>
             </a:pPr>
             <a:r>
-              <a:rPr lang="en-US" sz="3200" i="0" u="none" strike="noStrike" cap="none" dirty="0">
+              <a:rPr lang="en-US" sz="3200" b="1" i="0" u="none" strike="noStrike" cap="none" dirty="0">
                 <a:solidFill>
                   <a:schemeClr val="lt1"/>
                 </a:solidFill>
-                <a:latin typeface="Courier"/>
-                <a:ea typeface="Courier"/>
-                <a:cs typeface="Courier"/>
+                <a:latin typeface="Courier New" panose="02070309020205020404" pitchFamily="49" charset="0"/>
+                <a:ea typeface="Courier"/>
+                <a:cs typeface="Courier New" panose="02070309020205020404" pitchFamily="49" charset="0"/>
                 <a:sym typeface="Courier New"/>
               </a:rPr>
               <a:t>        print('Bigger than </a:t>
             </a:r>
             <a:r>
-              <a:rPr lang="en-US" sz="3200" dirty="0">
+              <a:rPr lang="en-US" sz="3200" b="1" dirty="0">
                 <a:solidFill>
                   <a:schemeClr val="lt1"/>
                 </a:solidFill>
-                <a:latin typeface="Courier"/>
-                <a:ea typeface="Courier"/>
-                <a:cs typeface="Courier"/>
+                <a:latin typeface="Courier New" panose="02070309020205020404" pitchFamily="49" charset="0"/>
+                <a:ea typeface="Courier"/>
+                <a:cs typeface="Courier New" panose="02070309020205020404" pitchFamily="49" charset="0"/>
                 <a:sym typeface="Courier New"/>
               </a:rPr>
               <a:t>2')</a:t>
             </a:r>
-            <a:endParaRPr lang="en-US" sz="3200" i="0" u="none" strike="noStrike" cap="none" dirty="0">
+            <a:endParaRPr lang="en-US" sz="3200" b="1" i="0" u="none" strike="noStrike" cap="none" dirty="0">
               <a:solidFill>
                 <a:schemeClr val="lt1"/>
               </a:solidFill>
-              <a:latin typeface="Courier"/>
+              <a:latin typeface="Courier New" panose="02070309020205020404" pitchFamily="49" charset="0"/>
               <a:ea typeface="Courier"/>
-              <a:cs typeface="Courier"/>
+              <a:cs typeface="Courier New" panose="02070309020205020404" pitchFamily="49" charset="0"/>
               <a:sym typeface="Courier New"/>
             </a:endParaRPr>
           </a:p>
@@ -33719,61 +33716,61 @@
               <a:buNone/>
             </a:pPr>
             <a:r>
-              <a:rPr lang="en-US" sz="3200" i="0" u="none" strike="noStrike" cap="none" dirty="0">
+              <a:rPr lang="en-US" sz="3200" b="1" i="0" u="none" strike="noStrike" cap="none" dirty="0">
                 <a:solidFill>
                   <a:schemeClr val="lt1"/>
                 </a:solidFill>
-                <a:latin typeface="Courier"/>
-                <a:ea typeface="Courier"/>
-                <a:cs typeface="Courier"/>
+                <a:latin typeface="Courier New" panose="02070309020205020404" pitchFamily="49" charset="0"/>
+                <a:ea typeface="Courier"/>
+                <a:cs typeface="Courier New" panose="02070309020205020404" pitchFamily="49" charset="0"/>
                 <a:sym typeface="Courier New"/>
               </a:rPr>
               <a:t>    print('Done with </a:t>
             </a:r>
             <a:r>
-              <a:rPr lang="en-US" sz="3200" i="0" u="none" strike="noStrike" cap="none" dirty="0" err="1">
+              <a:rPr lang="en-US" sz="3200" b="1" i="0" u="none" strike="noStrike" cap="none" dirty="0" err="1">
                 <a:solidFill>
                   <a:schemeClr val="lt1"/>
                 </a:solidFill>
-                <a:latin typeface="Courier"/>
-                <a:ea typeface="Courier"/>
-                <a:cs typeface="Courier"/>
+                <a:latin typeface="Courier New" panose="02070309020205020404" pitchFamily="49" charset="0"/>
+                <a:ea typeface="Courier"/>
+                <a:cs typeface="Courier New" panose="02070309020205020404" pitchFamily="49" charset="0"/>
                 <a:sym typeface="Courier New"/>
               </a:rPr>
               <a:t>i</a:t>
             </a:r>
             <a:r>
-              <a:rPr lang="en-US" sz="3200" i="0" u="none" strike="noStrike" cap="none" dirty="0">
+              <a:rPr lang="en-US" sz="3200" b="1" i="0" u="none" strike="noStrike" cap="none" dirty="0">
                 <a:solidFill>
                   <a:schemeClr val="lt1"/>
                 </a:solidFill>
-                <a:latin typeface="Courier"/>
-                <a:ea typeface="Courier"/>
-                <a:cs typeface="Courier"/>
+                <a:latin typeface="Courier New" panose="02070309020205020404" pitchFamily="49" charset="0"/>
+                <a:ea typeface="Courier"/>
+                <a:cs typeface="Courier New" panose="02070309020205020404" pitchFamily="49" charset="0"/>
                 <a:sym typeface="Courier New"/>
               </a:rPr>
               <a:t>', </a:t>
             </a:r>
             <a:r>
-              <a:rPr lang="en-US" sz="3200" i="0" u="none" strike="noStrike" cap="none" dirty="0" err="1">
+              <a:rPr lang="en-US" sz="3200" b="1" i="0" u="none" strike="noStrike" cap="none" dirty="0" err="1">
                 <a:solidFill>
                   <a:schemeClr val="lt1"/>
                 </a:solidFill>
-                <a:latin typeface="Courier"/>
-                <a:ea typeface="Courier"/>
-                <a:cs typeface="Courier"/>
+                <a:latin typeface="Courier New" panose="02070309020205020404" pitchFamily="49" charset="0"/>
+                <a:ea typeface="Courier"/>
+                <a:cs typeface="Courier New" panose="02070309020205020404" pitchFamily="49" charset="0"/>
                 <a:sym typeface="Courier New"/>
               </a:rPr>
               <a:t>i</a:t>
             </a:r>
             <a:r>
-              <a:rPr lang="en-US" sz="3200" i="0" u="none" strike="noStrike" cap="none" dirty="0">
+              <a:rPr lang="en-US" sz="3200" b="1" i="0" u="none" strike="noStrike" cap="none" dirty="0">
                 <a:solidFill>
                   <a:schemeClr val="lt1"/>
                 </a:solidFill>
-                <a:latin typeface="Courier"/>
-                <a:ea typeface="Courier"/>
-                <a:cs typeface="Courier"/>
+                <a:latin typeface="Courier New" panose="02070309020205020404" pitchFamily="49" charset="0"/>
+                <a:ea typeface="Courier"/>
+                <a:cs typeface="Courier New" panose="02070309020205020404" pitchFamily="49" charset="0"/>
                 <a:sym typeface="Courier New"/>
               </a:rPr>
               <a:t>)</a:t>
@@ -33798,13 +33795,13 @@
               <a:buNone/>
             </a:pPr>
             <a:r>
-              <a:rPr lang="en-US" sz="3200" dirty="0">
+              <a:rPr lang="en-US" sz="3200" b="1" dirty="0">
                 <a:solidFill>
                   <a:schemeClr val="lt1"/>
                 </a:solidFill>
-                <a:latin typeface="Courier"/>
-                <a:ea typeface="Courier"/>
-                <a:cs typeface="Courier"/>
+                <a:latin typeface="Courier New" panose="02070309020205020404" pitchFamily="49" charset="0"/>
+                <a:ea typeface="Courier"/>
+                <a:cs typeface="Courier New" panose="02070309020205020404" pitchFamily="49" charset="0"/>
                 <a:sym typeface="Courier New"/>
               </a:rPr>
               <a:t>print('All Done')</a:t>
@@ -33965,7 +33962,7 @@
               <a:buNone/>
             </a:pPr>
             <a:r>
-              <a:rPr lang="en-US" sz="3000" i="0" u="none" strike="noStrike" cap="none" dirty="0">
+              <a:rPr lang="en-US" sz="3000" b="1" i="0" u="none" strike="noStrike" cap="none" dirty="0">
                 <a:solidFill>
                   <a:schemeClr val="lt1"/>
                 </a:solidFill>
@@ -33996,7 +33993,7 @@
               <a:buNone/>
             </a:pPr>
             <a:r>
-              <a:rPr lang="en-US" sz="3000" i="0" u="none" strike="noStrike" cap="none" dirty="0">
+              <a:rPr lang="en-US" sz="3000" b="1" i="0" u="none" strike="noStrike" cap="none" dirty="0">
                 <a:solidFill>
                   <a:srgbClr val="00FF00"/>
                 </a:solidFill>
@@ -34016,7 +34013,7 @@
               <a:buSzPct val="25000"/>
             </a:pPr>
             <a:r>
-              <a:rPr lang="en-US" sz="3000" i="0" u="none" strike="noStrike" cap="none" dirty="0">
+              <a:rPr lang="en-US" sz="3000" b="1" i="0" u="none" strike="noStrike" cap="none" dirty="0">
                 <a:solidFill>
                   <a:srgbClr val="00FF00"/>
                 </a:solidFill>
@@ -34028,7 +34025,7 @@
               <a:t>    print('More than one</a:t>
             </a:r>
             <a:r>
-              <a:rPr lang="en-US" sz="3000" dirty="0">
+              <a:rPr lang="en-US" sz="3000" b="1" dirty="0">
                 <a:solidFill>
                   <a:srgbClr val="00FF00"/>
                 </a:solidFill>
@@ -34039,7 +34036,7 @@
               </a:rPr>
               <a:t>')</a:t>
             </a:r>
-            <a:endParaRPr lang="en-US" sz="3000" i="0" u="none" strike="noStrike" cap="none" dirty="0">
+            <a:endParaRPr lang="en-US" sz="3000" b="1" i="0" u="none" strike="noStrike" cap="none" dirty="0">
               <a:solidFill>
                 <a:srgbClr val="00FF00"/>
               </a:solidFill>
@@ -34068,7 +34065,7 @@
               <a:buNone/>
             </a:pPr>
             <a:r>
-              <a:rPr lang="en-US" sz="3000" i="0" u="none" strike="noStrike" cap="none" dirty="0">
+              <a:rPr lang="en-US" sz="3000" b="1" i="0" u="none" strike="noStrike" cap="none" dirty="0">
                 <a:solidFill>
                   <a:schemeClr val="lt1"/>
                 </a:solidFill>
@@ -34080,7 +34077,7 @@
               <a:t>   </a:t>
             </a:r>
             <a:r>
-              <a:rPr lang="en-US" sz="3000" i="0" u="none" strike="noStrike" cap="none" dirty="0">
+              <a:rPr lang="en-US" sz="3000" b="1" i="0" u="none" strike="noStrike" cap="none" dirty="0">
                 <a:solidFill>
                   <a:srgbClr val="FF00FF"/>
                 </a:solidFill>
@@ -34092,7 +34089,7 @@
               <a:t> </a:t>
             </a:r>
             <a:r>
-              <a:rPr lang="en-US" sz="3000" i="0" u="none" strike="noStrike" cap="none" dirty="0">
+              <a:rPr lang="en-US" sz="3000" b="1" i="0" u="none" strike="noStrike" cap="none" dirty="0">
                 <a:solidFill>
                   <a:srgbClr val="FF9900"/>
                 </a:solidFill>
@@ -34112,7 +34109,7 @@
               <a:buSzPct val="25000"/>
             </a:pPr>
             <a:r>
-              <a:rPr lang="en-US" sz="3000" i="0" u="none" strike="noStrike" cap="none" dirty="0">
+              <a:rPr lang="en-US" sz="3000" b="1" i="0" u="none" strike="noStrike" cap="none" dirty="0">
                 <a:solidFill>
                   <a:srgbClr val="FF9900"/>
                 </a:solidFill>
@@ -34124,7 +34121,7 @@
               <a:t>        print('Less than 100</a:t>
             </a:r>
             <a:r>
-              <a:rPr lang="en-US" sz="3000" dirty="0">
+              <a:rPr lang="en-US" sz="3000" b="1" dirty="0">
                 <a:solidFill>
                   <a:srgbClr val="FF9900"/>
                 </a:solidFill>
@@ -34135,7 +34132,7 @@
               </a:rPr>
               <a:t>') </a:t>
             </a:r>
-            <a:endParaRPr lang="en-US" sz="3000" i="0" u="none" strike="noStrike" cap="none" dirty="0">
+            <a:endParaRPr lang="en-US" sz="3000" b="1" i="0" u="none" strike="noStrike" cap="none" dirty="0">
               <a:solidFill>
                 <a:srgbClr val="FF9900"/>
               </a:solidFill>
@@ -34153,7 +34150,7 @@
               <a:buSzPct val="25000"/>
             </a:pPr>
             <a:r>
-              <a:rPr lang="en-US" sz="3000" i="0" u="none" strike="noStrike" cap="none" dirty="0">
+              <a:rPr lang="en-US" sz="3000" b="1" i="0" u="none" strike="noStrike" cap="none" dirty="0">
                 <a:solidFill>
                   <a:srgbClr val="00FFFF"/>
                 </a:solidFill>
@@ -34165,7 +34162,7 @@
               <a:t>print('All done</a:t>
             </a:r>
             <a:r>
-              <a:rPr lang="en-US" sz="3000" dirty="0">
+              <a:rPr lang="en-US" sz="3000" b="1" dirty="0">
                 <a:solidFill>
                   <a:srgbClr val="00FFFF"/>
                 </a:solidFill>
@@ -34176,7 +34173,7 @@
               </a:rPr>
               <a:t>')</a:t>
             </a:r>
-            <a:endParaRPr lang="en-US" sz="3000" i="0" u="none" strike="noStrike" cap="none" dirty="0">
+            <a:endParaRPr lang="en-US" sz="3000" b="1" i="0" u="none" strike="noStrike" cap="none" dirty="0">
               <a:solidFill>
                 <a:srgbClr val="00FFFF"/>
               </a:solidFill>
@@ -34320,13 +34317,13 @@
               <a:buNone/>
             </a:pPr>
             <a:r>
-              <a:rPr lang="en-US" sz="2600" u="none" strike="noStrike" cap="none" dirty="0">
+              <a:rPr lang="en-US" sz="2600" b="1" u="none" strike="noStrike" cap="none" dirty="0">
                 <a:solidFill>
                   <a:schemeClr val="lt1"/>
                 </a:solidFill>
-                <a:latin typeface="Arial" charset="0"/>
+                <a:latin typeface="Courier New" panose="02070309020205020404" pitchFamily="49" charset="0"/>
                 <a:ea typeface="Arial" charset="0"/>
-                <a:cs typeface="Arial" charset="0"/>
+                <a:cs typeface="Courier New" panose="02070309020205020404" pitchFamily="49" charset="0"/>
                 <a:sym typeface="Cabin"/>
               </a:rPr>
               <a:t>x &gt; 1</a:t>
@@ -34383,13 +34380,13 @@
               <a:buNone/>
             </a:pPr>
             <a:r>
-              <a:rPr lang="en-US" sz="2600" u="none" strike="noStrike" cap="none" dirty="0">
+              <a:rPr lang="en-US" sz="2000" b="1" u="none" strike="noStrike" cap="none" dirty="0">
                 <a:solidFill>
                   <a:schemeClr val="lt1"/>
                 </a:solidFill>
-                <a:latin typeface="Arial" charset="0"/>
+                <a:latin typeface="Courier New" panose="02070309020205020404" pitchFamily="49" charset="0"/>
                 <a:ea typeface="Arial" charset="0"/>
-                <a:cs typeface="Arial" charset="0"/>
+                <a:cs typeface="Courier New" panose="02070309020205020404" pitchFamily="49" charset="0"/>
                 <a:sym typeface="Cabin"/>
               </a:rPr>
               <a:t>print('More than one’)</a:t>
@@ -34446,13 +34443,13 @@
               <a:buNone/>
             </a:pPr>
             <a:r>
-              <a:rPr lang="en-US" sz="2600" u="none" strike="noStrike" cap="none" dirty="0">
+              <a:rPr lang="en-US" sz="2600" b="1" u="none" strike="noStrike" cap="none" dirty="0">
                 <a:solidFill>
                   <a:schemeClr val="lt1"/>
                 </a:solidFill>
-                <a:latin typeface="Arial" charset="0"/>
+                <a:latin typeface="Courier New" panose="02070309020205020404" pitchFamily="49" charset="0"/>
                 <a:ea typeface="Arial" charset="0"/>
-                <a:cs typeface="Arial" charset="0"/>
+                <a:cs typeface="Courier New" panose="02070309020205020404" pitchFamily="49" charset="0"/>
                 <a:sym typeface="Cabin"/>
               </a:rPr>
               <a:t>x &lt; 100</a:t>
@@ -34509,48 +34506,48 @@
               <a:buNone/>
             </a:pPr>
             <a:r>
-              <a:rPr lang="en-US" sz="2600" u="none" strike="noStrike" cap="none">
+              <a:rPr lang="en-US" sz="1800" b="1" u="none" strike="noStrike" cap="none">
                 <a:solidFill>
                   <a:schemeClr val="lt1"/>
                 </a:solidFill>
-                <a:latin typeface="Arial" charset="0"/>
+                <a:latin typeface="Courier New" panose="02070309020205020404" pitchFamily="49" charset="0"/>
                 <a:ea typeface="Arial" charset="0"/>
-                <a:cs typeface="Arial" charset="0"/>
+                <a:cs typeface="Courier New" panose="02070309020205020404" pitchFamily="49" charset="0"/>
                 <a:sym typeface="Cabin"/>
               </a:rPr>
               <a:t>print('Less </a:t>
             </a:r>
             <a:r>
-              <a:rPr lang="en-US" sz="2600" u="none" strike="noStrike" cap="none" dirty="0">
+              <a:rPr lang="en-US" sz="1800" b="1" u="none" strike="noStrike" cap="none" dirty="0">
                 <a:solidFill>
                   <a:schemeClr val="lt1"/>
                 </a:solidFill>
-                <a:latin typeface="Arial" charset="0"/>
+                <a:latin typeface="Courier New" panose="02070309020205020404" pitchFamily="49" charset="0"/>
                 <a:ea typeface="Arial" charset="0"/>
-                <a:cs typeface="Arial" charset="0"/>
+                <a:cs typeface="Courier New" panose="02070309020205020404" pitchFamily="49" charset="0"/>
                 <a:sym typeface="Cabin"/>
               </a:rPr>
               <a:t>than </a:t>
             </a:r>
             <a:r>
-              <a:rPr lang="en-US" sz="2600" u="none" strike="noStrike" cap="none">
+              <a:rPr lang="en-US" sz="1800" b="1" u="none" strike="noStrike" cap="none">
                 <a:solidFill>
                   <a:schemeClr val="lt1"/>
                 </a:solidFill>
-                <a:latin typeface="Arial" charset="0"/>
+                <a:latin typeface="Courier New" panose="02070309020205020404" pitchFamily="49" charset="0"/>
                 <a:ea typeface="Arial" charset="0"/>
-                <a:cs typeface="Arial" charset="0"/>
+                <a:cs typeface="Courier New" panose="02070309020205020404" pitchFamily="49" charset="0"/>
                 <a:sym typeface="Cabin"/>
               </a:rPr>
               <a:t>100')</a:t>
             </a:r>
-            <a:endParaRPr lang="en-US" sz="2600" u="none" strike="noStrike" cap="none" dirty="0">
+            <a:endParaRPr lang="en-US" sz="1800" b="1" u="none" strike="noStrike" cap="none" dirty="0">
               <a:solidFill>
                 <a:schemeClr val="lt1"/>
               </a:solidFill>
-              <a:latin typeface="Arial" charset="0"/>
+              <a:latin typeface="Courier New" panose="02070309020205020404" pitchFamily="49" charset="0"/>
               <a:ea typeface="Arial" charset="0"/>
-              <a:cs typeface="Arial" charset="0"/>
+              <a:cs typeface="Courier New" panose="02070309020205020404" pitchFamily="49" charset="0"/>
               <a:sym typeface="Cabin"/>
             </a:endParaRPr>
           </a:p>
@@ -34605,13 +34602,13 @@
               <a:buNone/>
             </a:pPr>
             <a:r>
-              <a:rPr lang="en-US" sz="2600" u="none" strike="noStrike" cap="none" dirty="0">
+              <a:rPr lang="en-US" sz="2000" b="1" u="none" strike="noStrike" cap="none" dirty="0">
                 <a:solidFill>
                   <a:schemeClr val="lt1"/>
                 </a:solidFill>
-                <a:latin typeface="Arial" charset="0"/>
+                <a:latin typeface="Courier New" panose="02070309020205020404" pitchFamily="49" charset="0"/>
                 <a:ea typeface="Arial" charset="0"/>
-                <a:cs typeface="Arial" charset="0"/>
+                <a:cs typeface="Courier New" panose="02070309020205020404" pitchFamily="49" charset="0"/>
                 <a:sym typeface="Cabin"/>
               </a:rPr>
               <a:t>print('All Done')</a:t>
@@ -34753,6 +34750,7 @@
         <p:nvCxnSpPr>
           <p:cNvPr id="379" name="Shape 379"/>
           <p:cNvCxnSpPr>
+            <a:cxnSpLocks/>
             <a:stCxn id="371" idx="0"/>
             <a:endCxn id="370" idx="2"/>
           </p:cNvCxnSpPr>
@@ -34847,13 +34845,13 @@
               <a:buNone/>
             </a:pPr>
             <a:r>
-              <a:rPr lang="en-US" sz="3200" u="none" strike="noStrike" cap="none" dirty="0">
+              <a:rPr lang="en-US" sz="3200" b="1" u="none" strike="noStrike" cap="none" dirty="0">
                 <a:solidFill>
                   <a:schemeClr val="lt1"/>
                 </a:solidFill>
-                <a:latin typeface="Arial" charset="0"/>
+                <a:latin typeface="Courier New" panose="02070309020205020404" pitchFamily="49" charset="0"/>
                 <a:ea typeface="Arial" charset="0"/>
-                <a:cs typeface="Arial" charset="0"/>
+                <a:cs typeface="Courier New" panose="02070309020205020404" pitchFamily="49" charset="0"/>
                 <a:sym typeface="Cabin"/>
               </a:rPr>
               <a:t>yes</a:t>
@@ -34904,13 +34902,13 @@
               <a:buNone/>
             </a:pPr>
             <a:r>
-              <a:rPr lang="en-US" sz="3200" u="none" strike="noStrike" cap="none" dirty="0">
+              <a:rPr lang="en-US" sz="3200" b="1" u="none" strike="noStrike" cap="none" dirty="0">
                 <a:solidFill>
                   <a:schemeClr val="lt1"/>
                 </a:solidFill>
-                <a:latin typeface="Arial" charset="0"/>
+                <a:latin typeface="Courier New" panose="02070309020205020404" pitchFamily="49" charset="0"/>
                 <a:ea typeface="Arial" charset="0"/>
-                <a:cs typeface="Arial" charset="0"/>
+                <a:cs typeface="Courier New" panose="02070309020205020404" pitchFamily="49" charset="0"/>
                 <a:sym typeface="Cabin"/>
               </a:rPr>
               <a:t>yes</a:t>
@@ -34952,8 +34950,8 @@
         </p:nvSpPr>
         <p:spPr>
           <a:xfrm>
-            <a:off x="11386329" y="5066072"/>
-            <a:ext cx="451643" cy="466212"/>
+            <a:off x="11147293" y="5066072"/>
+            <a:ext cx="690679" cy="466212"/>
           </a:xfrm>
           <a:prstGeom prst="rect">
             <a:avLst/>
@@ -34987,13 +34985,13 @@
               <a:buNone/>
             </a:pPr>
             <a:r>
-              <a:rPr lang="en-US" sz="3200" u="none" strike="noStrike" cap="none" dirty="0">
+              <a:rPr lang="en-US" sz="3200" b="1" u="none" strike="noStrike" cap="none" dirty="0">
                 <a:solidFill>
                   <a:schemeClr val="lt1"/>
                 </a:solidFill>
-                <a:latin typeface="Arial" charset="0"/>
+                <a:latin typeface="Courier New" panose="02070309020205020404" pitchFamily="49" charset="0"/>
                 <a:ea typeface="Arial" charset="0"/>
-                <a:cs typeface="Arial" charset="0"/>
+                <a:cs typeface="Courier New" panose="02070309020205020404" pitchFamily="49" charset="0"/>
                 <a:sym typeface="Cabin"/>
               </a:rPr>
               <a:t>no</a:t>
@@ -35009,8 +35007,8 @@
         </p:nvSpPr>
         <p:spPr>
           <a:xfrm>
-            <a:off x="8801078" y="2544284"/>
-            <a:ext cx="451643" cy="466212"/>
+            <a:off x="8501064" y="2544284"/>
+            <a:ext cx="751658" cy="466212"/>
           </a:xfrm>
           <a:prstGeom prst="rect">
             <a:avLst/>
@@ -35044,13 +35042,13 @@
               <a:buNone/>
             </a:pPr>
             <a:r>
-              <a:rPr lang="en-US" sz="3200" u="none" strike="noStrike" cap="none" dirty="0">
+              <a:rPr lang="en-US" sz="3200" b="1" u="none" strike="noStrike" cap="none" dirty="0">
                 <a:solidFill>
                   <a:schemeClr val="lt1"/>
                 </a:solidFill>
-                <a:latin typeface="Arial" charset="0"/>
+                <a:latin typeface="Courier New" panose="02070309020205020404" pitchFamily="49" charset="0"/>
                 <a:ea typeface="Arial" charset="0"/>
-                <a:cs typeface="Arial" charset="0"/>
+                <a:cs typeface="Courier New" panose="02070309020205020404" pitchFamily="49" charset="0"/>
                 <a:sym typeface="Cabin"/>
               </a:rPr>
               <a:t>no</a:t>

--- a/lectures/PY4E-03-Conditional.pptx
+++ b/lectures/PY4E-03-Conditional.pptx
@@ -7838,7 +7838,10 @@
               </a:spcAft>
               <a:buNone/>
             </a:pPr>
-            <a:endParaRPr/>
+            <a:endParaRPr b="1">
+              <a:latin typeface="Courier New" panose="02070309020205020404" pitchFamily="49" charset="0"/>
+              <a:cs typeface="Courier New" panose="02070309020205020404" pitchFamily="49" charset="0"/>
+            </a:endParaRPr>
           </a:p>
         </p:txBody>
       </p:sp>
@@ -7950,13 +7953,13 @@
               <a:buNone/>
             </a:pPr>
             <a:r>
-              <a:rPr lang="en-US" sz="3000" i="0" u="none" strike="noStrike" cap="none" dirty="0">
+              <a:rPr lang="en-US" sz="3000" b="1" i="0" u="none" strike="noStrike" cap="none" dirty="0">
                 <a:solidFill>
                   <a:srgbClr val="FFFFFF"/>
                 </a:solidFill>
-                <a:latin typeface="Courier"/>
-                <a:ea typeface="Courier"/>
-                <a:cs typeface="Courier"/>
+                <a:latin typeface="Courier New" panose="02070309020205020404" pitchFamily="49" charset="0"/>
+                <a:ea typeface="Courier"/>
+                <a:cs typeface="Courier New" panose="02070309020205020404" pitchFamily="49" charset="0"/>
                 <a:sym typeface="Courier New"/>
               </a:rPr>
               <a:t>x = 4</a:t>
@@ -7975,13 +7978,13 @@
               </a:spcAft>
               <a:buNone/>
             </a:pPr>
-            <a:endParaRPr sz="3000" i="0" u="none" strike="noStrike" cap="none" dirty="0">
+            <a:endParaRPr sz="3000" b="1" i="0" u="none" strike="noStrike" cap="none" dirty="0">
               <a:solidFill>
                 <a:schemeClr val="lt1"/>
               </a:solidFill>
-              <a:latin typeface="Courier"/>
+              <a:latin typeface="Courier New" panose="02070309020205020404" pitchFamily="49" charset="0"/>
               <a:ea typeface="Courier"/>
-              <a:cs typeface="Courier"/>
+              <a:cs typeface="Courier New" panose="02070309020205020404" pitchFamily="49" charset="0"/>
               <a:sym typeface="Courier New"/>
             </a:endParaRPr>
           </a:p>
@@ -8004,13 +8007,13 @@
               <a:buNone/>
             </a:pPr>
             <a:r>
-              <a:rPr lang="en-US" sz="3000" i="0" u="none" strike="noStrike" cap="none" dirty="0">
+              <a:rPr lang="en-US" sz="3000" b="1" i="0" u="none" strike="noStrike" cap="none" dirty="0">
                 <a:solidFill>
                   <a:srgbClr val="00FF00"/>
                 </a:solidFill>
-                <a:latin typeface="Courier"/>
-                <a:ea typeface="Courier"/>
-                <a:cs typeface="Courier"/>
+                <a:latin typeface="Courier New" panose="02070309020205020404" pitchFamily="49" charset="0"/>
+                <a:ea typeface="Courier"/>
+                <a:cs typeface="Courier New" panose="02070309020205020404" pitchFamily="49" charset="0"/>
                 <a:sym typeface="Courier New"/>
               </a:rPr>
               <a:t>if x &gt; 2 :</a:t>
@@ -8035,13 +8038,13 @@
               <a:buNone/>
             </a:pPr>
             <a:r>
-              <a:rPr lang="en-US" sz="3000" i="0" u="none" strike="noStrike" cap="none" dirty="0">
+              <a:rPr lang="en-US" sz="3000" b="1" i="0" u="none" strike="noStrike" cap="none" dirty="0">
                 <a:solidFill>
                   <a:srgbClr val="00FF00"/>
                 </a:solidFill>
-                <a:latin typeface="Courier"/>
-                <a:ea typeface="Courier"/>
-                <a:cs typeface="Courier"/>
+                <a:latin typeface="Courier New" panose="02070309020205020404" pitchFamily="49" charset="0"/>
+                <a:ea typeface="Courier"/>
+                <a:cs typeface="Courier New" panose="02070309020205020404" pitchFamily="49" charset="0"/>
                 <a:sym typeface="Courier New"/>
               </a:rPr>
               <a:t>    print('Bigger')</a:t>
@@ -8066,13 +8069,13 @@
               <a:buNone/>
             </a:pPr>
             <a:r>
-              <a:rPr lang="en-US" sz="3000" i="0" u="none" strike="noStrike" cap="none" dirty="0">
+              <a:rPr lang="en-US" sz="3000" b="1" i="0" u="none" strike="noStrike" cap="none" dirty="0">
                 <a:solidFill>
                   <a:srgbClr val="FF9900"/>
                 </a:solidFill>
-                <a:latin typeface="Courier"/>
-                <a:ea typeface="Courier"/>
-                <a:cs typeface="Courier"/>
+                <a:latin typeface="Courier New" panose="02070309020205020404" pitchFamily="49" charset="0"/>
+                <a:ea typeface="Courier"/>
+                <a:cs typeface="Courier New" panose="02070309020205020404" pitchFamily="49" charset="0"/>
                 <a:sym typeface="Courier New"/>
               </a:rPr>
               <a:t>else :</a:t>
@@ -8097,13 +8100,13 @@
               <a:buNone/>
             </a:pPr>
             <a:r>
-              <a:rPr lang="en-US" sz="3000" i="0" u="none" strike="noStrike" cap="none" dirty="0">
+              <a:rPr lang="en-US" sz="3000" b="1" i="0" u="none" strike="noStrike" cap="none" dirty="0">
                 <a:solidFill>
                   <a:srgbClr val="FF9900"/>
                 </a:solidFill>
-                <a:latin typeface="Courier"/>
-                <a:ea typeface="Courier"/>
-                <a:cs typeface="Courier"/>
+                <a:latin typeface="Courier New" panose="02070309020205020404" pitchFamily="49" charset="0"/>
+                <a:ea typeface="Courier"/>
+                <a:cs typeface="Courier New" panose="02070309020205020404" pitchFamily="49" charset="0"/>
                 <a:sym typeface="Courier New"/>
               </a:rPr>
               <a:t>    print('Smaller')</a:t>
@@ -8122,13 +8125,13 @@
               </a:spcAft>
               <a:buNone/>
             </a:pPr>
-            <a:endParaRPr sz="3000" i="0" u="none" strike="noStrike" cap="none" dirty="0">
+            <a:endParaRPr sz="3000" b="1" i="0" u="none" strike="noStrike" cap="none" dirty="0">
               <a:solidFill>
                 <a:srgbClr val="00FFFF"/>
               </a:solidFill>
-              <a:latin typeface="Courier"/>
+              <a:latin typeface="Courier New" panose="02070309020205020404" pitchFamily="49" charset="0"/>
               <a:ea typeface="Courier"/>
-              <a:cs typeface="Courier"/>
+              <a:cs typeface="Courier New" panose="02070309020205020404" pitchFamily="49" charset="0"/>
               <a:sym typeface="Courier New"/>
             </a:endParaRPr>
           </a:p>
@@ -8151,13 +8154,13 @@
               <a:buNone/>
             </a:pPr>
             <a:r>
-              <a:rPr lang="en-US" sz="3000" i="0" u="none" strike="noStrike" cap="none" dirty="0">
+              <a:rPr lang="en-US" sz="3000" b="1" i="0" u="none" strike="noStrike" cap="none" dirty="0">
                 <a:solidFill>
                   <a:srgbClr val="00FFFF"/>
                 </a:solidFill>
-                <a:latin typeface="Courier"/>
-                <a:ea typeface="Courier"/>
-                <a:cs typeface="Courier"/>
+                <a:latin typeface="Courier New" panose="02070309020205020404" pitchFamily="49" charset="0"/>
+                <a:ea typeface="Courier"/>
+                <a:cs typeface="Courier New" panose="02070309020205020404" pitchFamily="49" charset="0"/>
                 <a:sym typeface="Courier New"/>
               </a:rPr>
               <a:t>print('All done')</a:t>
@@ -8208,10 +8211,12 @@
               </a:spcAft>
               <a:buNone/>
             </a:pPr>
-            <a:endParaRPr>
+            <a:endParaRPr b="1">
               <a:solidFill>
                 <a:srgbClr val="FFFF00"/>
               </a:solidFill>
+              <a:latin typeface="Courier New" panose="02070309020205020404" pitchFamily="49" charset="0"/>
+              <a:cs typeface="Courier New" panose="02070309020205020404" pitchFamily="49" charset="0"/>
             </a:endParaRPr>
           </a:p>
         </p:txBody>
@@ -8265,13 +8270,13 @@
               <a:buNone/>
             </a:pPr>
             <a:r>
-              <a:rPr lang="en-US" sz="3200" u="none" strike="noStrike" cap="none" dirty="0">
+              <a:rPr lang="en-US" sz="3200" b="1" u="none" strike="noStrike" cap="none" dirty="0">
                 <a:solidFill>
                   <a:schemeClr val="lt1"/>
                 </a:solidFill>
-                <a:latin typeface="Arial" charset="0"/>
+                <a:latin typeface="Courier New" panose="02070309020205020404" pitchFamily="49" charset="0"/>
                 <a:ea typeface="Arial" charset="0"/>
-                <a:cs typeface="Arial" charset="0"/>
+                <a:cs typeface="Courier New" panose="02070309020205020404" pitchFamily="49" charset="0"/>
                 <a:sym typeface="Cabin"/>
               </a:rPr>
               <a:t>x &gt; 2</a:t>
@@ -8328,13 +8333,13 @@
               <a:buNone/>
             </a:pPr>
             <a:r>
-              <a:rPr lang="en-US" sz="3200" u="none" strike="noStrike" cap="none" dirty="0">
+              <a:rPr lang="en-US" sz="2000" b="1" u="none" strike="noStrike" cap="none" dirty="0">
                 <a:solidFill>
                   <a:schemeClr val="lt1"/>
                 </a:solidFill>
-                <a:latin typeface="Arial" charset="0"/>
+                <a:latin typeface="Courier New" panose="02070309020205020404" pitchFamily="49" charset="0"/>
                 <a:ea typeface="Arial" charset="0"/>
-                <a:cs typeface="Arial" charset="0"/>
+                <a:cs typeface="Courier New" panose="02070309020205020404" pitchFamily="49" charset="0"/>
                 <a:sym typeface="Cabin"/>
               </a:rPr>
               <a:t>print('Bigger')</a:t>
@@ -8463,13 +8468,13 @@
               <a:buNone/>
             </a:pPr>
             <a:r>
-              <a:rPr lang="en-US" sz="3200" u="none" strike="noStrike" cap="none" dirty="0">
+              <a:rPr lang="en-US" sz="3200" b="1" u="none" strike="noStrike" cap="none" dirty="0">
                 <a:solidFill>
                   <a:schemeClr val="lt1"/>
                 </a:solidFill>
-                <a:latin typeface="Arial" charset="0"/>
+                <a:latin typeface="Courier New" panose="02070309020205020404" pitchFamily="49" charset="0"/>
                 <a:ea typeface="Arial" charset="0"/>
-                <a:cs typeface="Arial" charset="0"/>
+                <a:cs typeface="Courier New" panose="02070309020205020404" pitchFamily="49" charset="0"/>
                 <a:sym typeface="Cabin"/>
               </a:rPr>
               <a:t>yes</a:t>
@@ -8520,13 +8525,13 @@
               <a:buNone/>
             </a:pPr>
             <a:r>
-              <a:rPr lang="en-US" sz="3200" u="none" strike="noStrike" cap="none" dirty="0">
+              <a:rPr lang="en-US" sz="3200" b="1" u="none" strike="noStrike" cap="none" dirty="0">
                 <a:solidFill>
                   <a:schemeClr val="lt1"/>
                 </a:solidFill>
-                <a:latin typeface="Arial" charset="0"/>
+                <a:latin typeface="Courier New" panose="02070309020205020404" pitchFamily="49" charset="0"/>
                 <a:ea typeface="Arial" charset="0"/>
-                <a:cs typeface="Arial" charset="0"/>
+                <a:cs typeface="Courier New" panose="02070309020205020404" pitchFamily="49" charset="0"/>
                 <a:sym typeface="Cabin"/>
               </a:rPr>
               <a:t>no</a:t>
@@ -8635,13 +8640,13 @@
               <a:buNone/>
             </a:pPr>
             <a:r>
-              <a:rPr lang="en-US" sz="3200" u="none" strike="noStrike" cap="none" dirty="0">
+              <a:rPr lang="en-US" sz="3200" b="1" u="none" strike="noStrike" cap="none" dirty="0">
                 <a:solidFill>
                   <a:schemeClr val="lt1"/>
                 </a:solidFill>
-                <a:latin typeface="Arial" charset="0"/>
+                <a:latin typeface="Courier New" panose="02070309020205020404" pitchFamily="49" charset="0"/>
                 <a:ea typeface="Arial" charset="0"/>
-                <a:cs typeface="Arial" charset="0"/>
+                <a:cs typeface="Courier New" panose="02070309020205020404" pitchFamily="49" charset="0"/>
                 <a:sym typeface="Cabin"/>
               </a:rPr>
               <a:t>x = 4</a:t>
@@ -8828,13 +8833,13 @@
               <a:buNone/>
             </a:pPr>
             <a:r>
-              <a:rPr lang="en-US" sz="3300" u="none" strike="noStrike" cap="none" dirty="0">
+              <a:rPr lang="en-US" sz="2400" b="1" u="none" strike="noStrike" cap="none" dirty="0">
                 <a:solidFill>
                   <a:schemeClr val="lt1"/>
                 </a:solidFill>
-                <a:latin typeface="Arial" charset="0"/>
+                <a:latin typeface="Courier New" panose="02070309020205020404" pitchFamily="49" charset="0"/>
                 <a:ea typeface="Arial" charset="0"/>
-                <a:cs typeface="Arial" charset="0"/>
+                <a:cs typeface="Courier New" panose="02070309020205020404" pitchFamily="49" charset="0"/>
                 <a:sym typeface="Cabin"/>
               </a:rPr>
               <a:t>print('All Done')</a:t>
@@ -8891,13 +8896,13 @@
               <a:buNone/>
             </a:pPr>
             <a:r>
-              <a:rPr lang="en-US" sz="3200" u="none" strike="noStrike" cap="none" dirty="0">
+              <a:rPr lang="en-US" sz="2000" b="1" u="none" strike="noStrike" cap="none" dirty="0">
                 <a:solidFill>
                   <a:schemeClr val="lt1"/>
                 </a:solidFill>
-                <a:latin typeface="Arial" charset="0"/>
+                <a:latin typeface="Courier New" panose="02070309020205020404" pitchFamily="49" charset="0"/>
                 <a:ea typeface="Arial" charset="0"/>
-                <a:cs typeface="Arial" charset="0"/>
+                <a:cs typeface="Courier New" panose="02070309020205020404" pitchFamily="49" charset="0"/>
                 <a:sym typeface="Cabin"/>
               </a:rPr>
               <a:t>print('Not bigger')</a:t>
@@ -9136,7 +9141,7 @@
               <a:buNone/>
             </a:pPr>
             <a:r>
-              <a:rPr lang="en-US" sz="3000" i="0" u="none" strike="noStrike" cap="none" dirty="0">
+              <a:rPr lang="en-US" sz="3000" b="1" i="0" u="none" strike="noStrike" cap="none" dirty="0">
                 <a:solidFill>
                   <a:srgbClr val="00FF00"/>
                 </a:solidFill>
@@ -9148,7 +9153,7 @@
               <a:t>if</a:t>
             </a:r>
             <a:r>
-              <a:rPr lang="en-US" sz="3000" i="0" u="none" strike="noStrike" cap="none" dirty="0">
+              <a:rPr lang="en-US" sz="3000" b="1" i="0" u="none" strike="noStrike" cap="none" dirty="0">
                 <a:solidFill>
                   <a:schemeClr val="lt1"/>
                 </a:solidFill>
@@ -9168,7 +9173,7 @@
               <a:buSzPct val="25000"/>
             </a:pPr>
             <a:r>
-              <a:rPr lang="en-US" sz="3000" i="0" u="none" strike="noStrike" cap="none" dirty="0">
+              <a:rPr lang="en-US" sz="3000" b="1" i="0" u="none" strike="noStrike" cap="none" dirty="0">
                 <a:solidFill>
                   <a:schemeClr val="lt1"/>
                 </a:solidFill>
@@ -9180,7 +9185,7 @@
               <a:t>    </a:t>
             </a:r>
             <a:r>
-              <a:rPr lang="en-US" sz="3000" i="0" u="none" strike="noStrike" cap="none" dirty="0">
+              <a:rPr lang="en-US" sz="3000" b="1" i="0" u="none" strike="noStrike" cap="none" dirty="0">
                 <a:solidFill>
                   <a:srgbClr val="00FF00"/>
                 </a:solidFill>
@@ -9192,7 +9197,7 @@
               <a:t>print(</a:t>
             </a:r>
             <a:r>
-              <a:rPr lang="en-US" sz="3000" i="0" u="none" strike="noStrike" cap="none" dirty="0">
+              <a:rPr lang="en-US" sz="3000" b="1" i="0" u="none" strike="noStrike" cap="none" dirty="0">
                 <a:solidFill>
                   <a:schemeClr val="lt1"/>
                 </a:solidFill>
@@ -9204,7 +9209,7 @@
               <a:t>'</a:t>
             </a:r>
             <a:r>
-              <a:rPr lang="en-US" sz="3000" dirty="0">
+              <a:rPr lang="en-US" sz="3000" b="1" dirty="0">
                 <a:solidFill>
                   <a:schemeClr val="lt1"/>
                 </a:solidFill>
@@ -9216,7 +9221,7 @@
               <a:t>s</a:t>
             </a:r>
             <a:r>
-              <a:rPr lang="en-US" sz="3000" i="0" u="none" strike="noStrike" cap="none" dirty="0">
+              <a:rPr lang="en-US" sz="3000" b="1" i="0" u="none" strike="noStrike" cap="none" dirty="0">
                 <a:solidFill>
                   <a:schemeClr val="lt1"/>
                 </a:solidFill>
@@ -9228,7 +9233,7 @@
               <a:t>mall'</a:t>
             </a:r>
             <a:r>
-              <a:rPr lang="en-US" sz="3000" dirty="0">
+              <a:rPr lang="en-US" sz="3000" b="1" dirty="0">
                 <a:solidFill>
                   <a:srgbClr val="00FF00"/>
                 </a:solidFill>
@@ -9239,7 +9244,7 @@
               </a:rPr>
               <a:t>)</a:t>
             </a:r>
-            <a:endParaRPr lang="en-US" sz="3000" i="0" u="none" strike="noStrike" cap="none" dirty="0">
+            <a:endParaRPr lang="en-US" sz="3000" b="1" i="0" u="none" strike="noStrike" cap="none" dirty="0">
               <a:solidFill>
                 <a:schemeClr val="lt1"/>
               </a:solidFill>
@@ -9268,7 +9273,7 @@
               <a:buNone/>
             </a:pPr>
             <a:r>
-              <a:rPr lang="en-US" sz="3000" i="0" u="none" strike="noStrike" cap="none" dirty="0" err="1">
+              <a:rPr lang="en-US" sz="3000" b="1" i="0" u="none" strike="noStrike" cap="none" dirty="0" err="1">
                 <a:solidFill>
                   <a:srgbClr val="00FF00"/>
                 </a:solidFill>
@@ -9280,7 +9285,7 @@
               <a:t>elif</a:t>
             </a:r>
             <a:r>
-              <a:rPr lang="en-US" sz="3000" i="0" u="none" strike="noStrike" cap="none" dirty="0">
+              <a:rPr lang="en-US" sz="3000" b="1" i="0" u="none" strike="noStrike" cap="none" dirty="0">
                 <a:solidFill>
                   <a:schemeClr val="lt1"/>
                 </a:solidFill>
@@ -9300,7 +9305,7 @@
               <a:buSzPct val="25000"/>
             </a:pPr>
             <a:r>
-              <a:rPr lang="en-US" sz="3000" i="0" u="none" strike="noStrike" cap="none" dirty="0">
+              <a:rPr lang="en-US" sz="3000" b="1" i="0" u="none" strike="noStrike" cap="none" dirty="0">
                 <a:solidFill>
                   <a:schemeClr val="lt1"/>
                 </a:solidFill>
@@ -9312,7 +9317,7 @@
               <a:t>    </a:t>
             </a:r>
             <a:r>
-              <a:rPr lang="en-US" sz="3000" i="0" u="none" strike="noStrike" cap="none" dirty="0">
+              <a:rPr lang="en-US" sz="3000" b="1" i="0" u="none" strike="noStrike" cap="none" dirty="0">
                 <a:solidFill>
                   <a:srgbClr val="00FF00"/>
                 </a:solidFill>
@@ -9324,7 +9329,7 @@
               <a:t>print(</a:t>
             </a:r>
             <a:r>
-              <a:rPr lang="en-US" sz="3000" i="0" u="none" strike="noStrike" cap="none" dirty="0">
+              <a:rPr lang="en-US" sz="3000" b="1" i="0" u="none" strike="noStrike" cap="none" dirty="0">
                 <a:solidFill>
                   <a:schemeClr val="lt1"/>
                 </a:solidFill>
@@ -9336,7 +9341,7 @@
               <a:t>'</a:t>
             </a:r>
             <a:r>
-              <a:rPr lang="en-US" sz="3000" dirty="0">
+              <a:rPr lang="en-US" sz="3000" b="1" dirty="0">
                 <a:solidFill>
                   <a:schemeClr val="lt1"/>
                 </a:solidFill>
@@ -9348,7 +9353,7 @@
               <a:t>Medium'</a:t>
             </a:r>
             <a:r>
-              <a:rPr lang="en-US" sz="3000" dirty="0">
+              <a:rPr lang="en-US" sz="3000" b="1" dirty="0">
                 <a:solidFill>
                   <a:srgbClr val="00FF00"/>
                 </a:solidFill>
@@ -9359,7 +9364,7 @@
               </a:rPr>
               <a:t>)</a:t>
             </a:r>
-            <a:endParaRPr lang="en-US" sz="3000" i="0" u="none" strike="noStrike" cap="none" dirty="0">
+            <a:endParaRPr lang="en-US" sz="3000" b="1" i="0" u="none" strike="noStrike" cap="none" dirty="0">
               <a:solidFill>
                 <a:schemeClr val="lt1"/>
               </a:solidFill>
@@ -9388,7 +9393,7 @@
               <a:buNone/>
             </a:pPr>
             <a:r>
-              <a:rPr lang="en-US" sz="3000" i="0" u="none" strike="noStrike" cap="none" dirty="0">
+              <a:rPr lang="en-US" sz="3000" b="1" i="0" u="none" strike="noStrike" cap="none" dirty="0">
                 <a:solidFill>
                   <a:srgbClr val="00FF00"/>
                 </a:solidFill>
@@ -9400,7 +9405,7 @@
               <a:t>else</a:t>
             </a:r>
             <a:r>
-              <a:rPr lang="en-US" sz="3000" i="0" u="none" strike="noStrike" cap="none" dirty="0">
+              <a:rPr lang="en-US" sz="3000" b="1" i="0" u="none" strike="noStrike" cap="none" dirty="0">
                 <a:solidFill>
                   <a:schemeClr val="lt1"/>
                 </a:solidFill>
@@ -9420,7 +9425,7 @@
               <a:buSzPct val="25000"/>
             </a:pPr>
             <a:r>
-              <a:rPr lang="en-US" sz="3000" i="0" u="none" strike="noStrike" cap="none" dirty="0">
+              <a:rPr lang="en-US" sz="3000" b="1" i="0" u="none" strike="noStrike" cap="none" dirty="0">
                 <a:solidFill>
                   <a:schemeClr val="lt1"/>
                 </a:solidFill>
@@ -9432,7 +9437,7 @@
               <a:t>    </a:t>
             </a:r>
             <a:r>
-              <a:rPr lang="en-US" sz="3000" i="0" u="none" strike="noStrike" cap="none" dirty="0">
+              <a:rPr lang="en-US" sz="3000" b="1" i="0" u="none" strike="noStrike" cap="none" dirty="0">
                 <a:solidFill>
                   <a:srgbClr val="00FF00"/>
                 </a:solidFill>
@@ -9444,7 +9449,7 @@
               <a:t>print(</a:t>
             </a:r>
             <a:r>
-              <a:rPr lang="en-US" sz="3000" i="0" u="none" strike="noStrike" cap="none" dirty="0">
+              <a:rPr lang="en-US" sz="3000" b="1" i="0" u="none" strike="noStrike" cap="none" dirty="0">
                 <a:solidFill>
                   <a:schemeClr val="lt1"/>
                 </a:solidFill>
@@ -9456,7 +9461,7 @@
               <a:t>'LARGE'</a:t>
             </a:r>
             <a:r>
-              <a:rPr lang="en-US" sz="3000" dirty="0">
+              <a:rPr lang="en-US" sz="3000" b="1" dirty="0">
                 <a:solidFill>
                   <a:srgbClr val="00FF00"/>
                 </a:solidFill>
@@ -9467,7 +9472,7 @@
               </a:rPr>
               <a:t>)</a:t>
             </a:r>
-            <a:endParaRPr lang="en-US" sz="3000" i="0" u="none" strike="noStrike" cap="none" dirty="0">
+            <a:endParaRPr lang="en-US" sz="3000" b="1" i="0" u="none" strike="noStrike" cap="none" dirty="0">
               <a:solidFill>
                 <a:schemeClr val="lt1"/>
               </a:solidFill>
@@ -9485,7 +9490,7 @@
               <a:buSzPct val="25000"/>
             </a:pPr>
             <a:r>
-              <a:rPr lang="en-US" sz="3000" i="0" u="none" strike="noStrike" cap="none" dirty="0">
+              <a:rPr lang="en-US" sz="3000" b="1" i="0" u="none" strike="noStrike" cap="none" dirty="0">
                 <a:solidFill>
                   <a:srgbClr val="00FF00"/>
                 </a:solidFill>
@@ -9497,7 +9502,7 @@
               <a:t>print</a:t>
             </a:r>
             <a:r>
-              <a:rPr lang="en-US" sz="3000" dirty="0">
+              <a:rPr lang="en-US" sz="3000" b="1" dirty="0">
                 <a:solidFill>
                   <a:schemeClr val="lt1"/>
                 </a:solidFill>
@@ -9509,7 +9514,7 @@
               <a:t>(</a:t>
             </a:r>
             <a:r>
-              <a:rPr lang="en-US" sz="3000" i="0" u="none" strike="noStrike" cap="none" dirty="0">
+              <a:rPr lang="en-US" sz="3000" b="1" i="0" u="none" strike="noStrike" cap="none" dirty="0">
                 <a:solidFill>
                   <a:schemeClr val="lt1"/>
                 </a:solidFill>
@@ -9521,7 +9526,7 @@
               <a:t>'All done'</a:t>
             </a:r>
             <a:r>
-              <a:rPr lang="en-US" sz="3000" dirty="0">
+              <a:rPr lang="en-US" sz="3000" b="1" dirty="0">
                 <a:solidFill>
                   <a:srgbClr val="00FF00"/>
                 </a:solidFill>
@@ -9532,7 +9537,7 @@
               </a:rPr>
               <a:t>)</a:t>
             </a:r>
-            <a:endParaRPr lang="en-US" sz="3000" i="0" u="none" strike="noStrike" cap="none" dirty="0">
+            <a:endParaRPr lang="en-US" sz="3000" b="1" i="0" u="none" strike="noStrike" cap="none" dirty="0">
               <a:solidFill>
                 <a:schemeClr val="lt1"/>
               </a:solidFill>
@@ -9593,13 +9598,13 @@
               <a:buNone/>
             </a:pPr>
             <a:r>
-              <a:rPr lang="en-US" sz="3700" u="none" strike="noStrike" cap="none" dirty="0">
+              <a:rPr lang="en-US" sz="3200" b="1" u="none" strike="noStrike" cap="none" dirty="0">
                 <a:solidFill>
                   <a:schemeClr val="lt1"/>
                 </a:solidFill>
-                <a:latin typeface="Arial" charset="0"/>
+                <a:latin typeface="Courier New" panose="02070309020205020404" pitchFamily="49" charset="0"/>
                 <a:ea typeface="Arial" charset="0"/>
-                <a:cs typeface="Arial" charset="0"/>
+                <a:cs typeface="Courier New" panose="02070309020205020404" pitchFamily="49" charset="0"/>
                 <a:sym typeface="Cabin"/>
               </a:rPr>
               <a:t>x &lt; 2</a:t>
@@ -9656,37 +9661,37 @@
               <a:buNone/>
             </a:pPr>
             <a:r>
-              <a:rPr lang="en-US" sz="3200" u="none" strike="noStrike" cap="none" dirty="0">
+              <a:rPr lang="en-US" sz="2400" b="1" u="none" strike="noStrike" cap="none" dirty="0">
                 <a:solidFill>
                   <a:schemeClr val="lt1"/>
                 </a:solidFill>
-                <a:latin typeface="Arial" charset="0"/>
+                <a:latin typeface="Courier New" panose="02070309020205020404" pitchFamily="49" charset="0"/>
                 <a:ea typeface="Arial" charset="0"/>
-                <a:cs typeface="Arial" charset="0"/>
+                <a:cs typeface="Courier New" panose="02070309020205020404" pitchFamily="49" charset="0"/>
                 <a:sym typeface="Cabin"/>
               </a:rPr>
               <a:t>print('</a:t>
             </a:r>
             <a:r>
-              <a:rPr lang="en-US" sz="3200" dirty="0">
+              <a:rPr lang="en-US" sz="2400" b="1" dirty="0">
                 <a:solidFill>
                   <a:schemeClr val="lt1"/>
                 </a:solidFill>
-                <a:latin typeface="Arial" charset="0"/>
+                <a:latin typeface="Courier New" panose="02070309020205020404" pitchFamily="49" charset="0"/>
                 <a:ea typeface="Arial" charset="0"/>
-                <a:cs typeface="Arial" charset="0"/>
+                <a:cs typeface="Courier New" panose="02070309020205020404" pitchFamily="49" charset="0"/>
                 <a:sym typeface="Cabin"/>
               </a:rPr>
               <a:t>s</a:t>
             </a:r>
             <a:r>
-              <a:rPr lang="en-US" sz="3200" u="none" strike="noStrike" cap="none" dirty="0">
+              <a:rPr lang="en-US" sz="2400" b="1" u="none" strike="noStrike" cap="none" dirty="0">
                 <a:solidFill>
                   <a:schemeClr val="lt1"/>
                 </a:solidFill>
-                <a:latin typeface="Arial" charset="0"/>
+                <a:latin typeface="Courier New" panose="02070309020205020404" pitchFamily="49" charset="0"/>
                 <a:ea typeface="Arial" charset="0"/>
-                <a:cs typeface="Arial" charset="0"/>
+                <a:cs typeface="Courier New" panose="02070309020205020404" pitchFamily="49" charset="0"/>
                 <a:sym typeface="Cabin"/>
               </a:rPr>
               <a:t>mall')</a:t>
@@ -9789,13 +9794,13 @@
               <a:buNone/>
             </a:pPr>
             <a:r>
-              <a:rPr lang="en-US" sz="3200" u="none" strike="noStrike" cap="none" dirty="0">
+              <a:rPr lang="en-US" sz="2400" b="1" u="none" strike="noStrike" cap="none" dirty="0">
                 <a:solidFill>
                   <a:schemeClr val="lt1"/>
                 </a:solidFill>
-                <a:latin typeface="Arial" charset="0"/>
+                <a:latin typeface="Courier New" panose="02070309020205020404" pitchFamily="49" charset="0"/>
                 <a:ea typeface="Arial" charset="0"/>
-                <a:cs typeface="Arial" charset="0"/>
+                <a:cs typeface="Courier New" panose="02070309020205020404" pitchFamily="49" charset="0"/>
                 <a:sym typeface="Cabin"/>
               </a:rPr>
               <a:t>yes</a:t>
@@ -9846,13 +9851,13 @@
               <a:buNone/>
             </a:pPr>
             <a:r>
-              <a:rPr lang="en-US" sz="3200" u="none" strike="noStrike" cap="none" dirty="0">
+              <a:rPr lang="en-US" sz="2400" b="1" u="none" strike="noStrike" cap="none" dirty="0">
                 <a:solidFill>
                   <a:schemeClr val="lt1"/>
                 </a:solidFill>
-                <a:latin typeface="Arial" charset="0"/>
+                <a:latin typeface="Courier New" panose="02070309020205020404" pitchFamily="49" charset="0"/>
                 <a:ea typeface="Arial" charset="0"/>
-                <a:cs typeface="Arial" charset="0"/>
+                <a:cs typeface="Courier New" panose="02070309020205020404" pitchFamily="49" charset="0"/>
                 <a:sym typeface="Cabin"/>
               </a:rPr>
               <a:t>no</a:t>
@@ -9946,8 +9951,8 @@
         </p:nvSpPr>
         <p:spPr>
           <a:xfrm>
-            <a:off x="7807624" y="7377204"/>
-            <a:ext cx="3061023" cy="852065"/>
+            <a:off x="7384631" y="7392649"/>
+            <a:ext cx="3854724" cy="852065"/>
           </a:xfrm>
           <a:prstGeom prst="rect">
             <a:avLst/>
@@ -9987,13 +9992,13 @@
               <a:buNone/>
             </a:pPr>
             <a:r>
-              <a:rPr lang="en-US" sz="3300" u="none" strike="noStrike" cap="none" dirty="0">
+              <a:rPr lang="en-US" sz="2800" b="1" u="none" strike="noStrike" cap="none" dirty="0">
                 <a:solidFill>
                   <a:schemeClr val="lt1"/>
                 </a:solidFill>
-                <a:latin typeface="Arial" charset="0"/>
+                <a:latin typeface="Courier New" panose="02070309020205020404" pitchFamily="49" charset="0"/>
                 <a:ea typeface="Arial" charset="0"/>
-                <a:cs typeface="Arial" charset="0"/>
+                <a:cs typeface="Courier New" panose="02070309020205020404" pitchFamily="49" charset="0"/>
                 <a:sym typeface="Cabin"/>
               </a:rPr>
               <a:t>print('All Done')</a:t>
@@ -10050,13 +10055,13 @@
               <a:buNone/>
             </a:pPr>
             <a:r>
-              <a:rPr lang="en-US" sz="3700" u="none" strike="noStrike" cap="none" dirty="0">
+              <a:rPr lang="en-US" sz="3200" b="1" u="none" strike="noStrike" cap="none" dirty="0">
                 <a:solidFill>
                   <a:schemeClr val="lt1"/>
                 </a:solidFill>
-                <a:latin typeface="Arial" charset="0"/>
+                <a:latin typeface="Courier New" panose="02070309020205020404" pitchFamily="49" charset="0"/>
                 <a:ea typeface="Arial" charset="0"/>
-                <a:cs typeface="Arial" charset="0"/>
+                <a:cs typeface="Courier New" panose="02070309020205020404" pitchFamily="49" charset="0"/>
                 <a:sym typeface="Cabin"/>
               </a:rPr>
               <a:t>x &lt; 10</a:t>
@@ -10113,13 +10118,13 @@
               <a:buNone/>
             </a:pPr>
             <a:r>
-              <a:rPr lang="en-US" sz="3200" u="none" strike="noStrike" cap="none" dirty="0">
+              <a:rPr lang="en-US" sz="2400" b="1" u="none" strike="noStrike" cap="none" dirty="0">
                 <a:solidFill>
                   <a:schemeClr val="lt1"/>
                 </a:solidFill>
-                <a:latin typeface="Arial" charset="0"/>
+                <a:latin typeface="Courier New" panose="02070309020205020404" pitchFamily="49" charset="0"/>
                 <a:ea typeface="Arial" charset="0"/>
-                <a:cs typeface="Arial" charset="0"/>
+                <a:cs typeface="Courier New" panose="02070309020205020404" pitchFamily="49" charset="0"/>
                 <a:sym typeface="Cabin"/>
               </a:rPr>
               <a:t>print('Medium')</a:t>
@@ -10196,13 +10201,13 @@
               <a:buNone/>
             </a:pPr>
             <a:r>
-              <a:rPr lang="en-US" sz="3200" u="none" strike="noStrike" cap="none" dirty="0">
+              <a:rPr lang="en-US" sz="2400" b="1" u="none" strike="noStrike" cap="none" dirty="0">
                 <a:solidFill>
                   <a:schemeClr val="lt1"/>
                 </a:solidFill>
-                <a:latin typeface="Arial" charset="0"/>
+                <a:latin typeface="Courier New" panose="02070309020205020404" pitchFamily="49" charset="0"/>
                 <a:ea typeface="Arial" charset="0"/>
-                <a:cs typeface="Arial" charset="0"/>
+                <a:cs typeface="Courier New" panose="02070309020205020404" pitchFamily="49" charset="0"/>
                 <a:sym typeface="Cabin"/>
               </a:rPr>
               <a:t>yes</a:t>
@@ -10337,13 +10342,13 @@
               <a:buNone/>
             </a:pPr>
             <a:r>
-              <a:rPr lang="en-US" sz="3200" u="none" strike="noStrike" cap="none" dirty="0">
+              <a:rPr lang="en-US" sz="2400" b="1" u="none" strike="noStrike" cap="none" dirty="0">
                 <a:solidFill>
                   <a:schemeClr val="lt1"/>
                 </a:solidFill>
-                <a:latin typeface="Arial" charset="0"/>
+                <a:latin typeface="Courier New" panose="02070309020205020404" pitchFamily="49" charset="0"/>
                 <a:ea typeface="Arial" charset="0"/>
-                <a:cs typeface="Arial" charset="0"/>
+                <a:cs typeface="Courier New" panose="02070309020205020404" pitchFamily="49" charset="0"/>
                 <a:sym typeface="Cabin"/>
               </a:rPr>
               <a:t>print('LARGE')</a:t>
@@ -10420,13 +10425,13 @@
               <a:buNone/>
             </a:pPr>
             <a:r>
-              <a:rPr lang="en-US" sz="3200" u="none" strike="noStrike" cap="none" dirty="0">
+              <a:rPr lang="en-US" sz="2400" b="1" u="none" strike="noStrike" cap="none" dirty="0">
                 <a:solidFill>
                   <a:schemeClr val="lt1"/>
                 </a:solidFill>
-                <a:latin typeface="Arial" charset="0"/>
+                <a:latin typeface="Courier New" panose="02070309020205020404" pitchFamily="49" charset="0"/>
                 <a:ea typeface="Arial" charset="0"/>
-                <a:cs typeface="Arial" charset="0"/>
+                <a:cs typeface="Courier New" panose="02070309020205020404" pitchFamily="49" charset="0"/>
                 <a:sym typeface="Cabin"/>
               </a:rPr>
               <a:t>no</a:t>
@@ -10563,7 +10568,7 @@
               <a:buNone/>
             </a:pPr>
             <a:r>
-              <a:rPr lang="en-US" sz="3000" i="0" u="none" strike="noStrike" cap="none" dirty="0">
+              <a:rPr lang="en-US" sz="3000" b="1" i="0" u="none" strike="noStrike" cap="none" dirty="0">
                 <a:solidFill>
                   <a:schemeClr val="bg1"/>
                 </a:solidFill>
@@ -10594,7 +10599,7 @@
               <a:buNone/>
             </a:pPr>
             <a:r>
-              <a:rPr lang="en-US" sz="3000" i="0" u="none" strike="noStrike" cap="none" dirty="0">
+              <a:rPr lang="en-US" sz="3000" b="1" i="0" u="none" strike="noStrike" cap="none" dirty="0">
                 <a:solidFill>
                   <a:srgbClr val="FFC000"/>
                 </a:solidFill>
@@ -10614,7 +10619,7 @@
               <a:buSzPct val="25000"/>
             </a:pPr>
             <a:r>
-              <a:rPr lang="en-US" sz="3000" i="0" u="none" strike="noStrike" cap="none" dirty="0">
+              <a:rPr lang="en-US" sz="3000" b="1" i="0" u="none" strike="noStrike" cap="none" dirty="0">
                 <a:solidFill>
                   <a:srgbClr val="FFC000"/>
                 </a:solidFill>
@@ -10626,7 +10631,7 @@
               <a:t>    print('</a:t>
             </a:r>
             <a:r>
-              <a:rPr lang="en-US" sz="3000" dirty="0">
+              <a:rPr lang="en-US" sz="3000" b="1" dirty="0">
                 <a:solidFill>
                   <a:srgbClr val="FFC000"/>
                 </a:solidFill>
@@ -10638,7 +10643,7 @@
               <a:t>s</a:t>
             </a:r>
             <a:r>
-              <a:rPr lang="en-US" sz="3000" i="0" u="none" strike="noStrike" cap="none" dirty="0">
+              <a:rPr lang="en-US" sz="3000" b="1" i="0" u="none" strike="noStrike" cap="none" dirty="0">
                 <a:solidFill>
                   <a:srgbClr val="FFC000"/>
                 </a:solidFill>
@@ -10650,7 +10655,7 @@
               <a:t>mall'</a:t>
             </a:r>
             <a:r>
-              <a:rPr lang="en-US" sz="3000" dirty="0">
+              <a:rPr lang="en-US" sz="3000" b="1" dirty="0">
                 <a:solidFill>
                   <a:srgbClr val="FFC000"/>
                 </a:solidFill>
@@ -10661,7 +10666,7 @@
               </a:rPr>
               <a:t>)</a:t>
             </a:r>
-            <a:endParaRPr lang="en-US" sz="3000" i="0" u="none" strike="noStrike" cap="none" dirty="0">
+            <a:endParaRPr lang="en-US" sz="3000" b="1" i="0" u="none" strike="noStrike" cap="none" dirty="0">
               <a:solidFill>
                 <a:srgbClr val="FFC000"/>
               </a:solidFill>
@@ -10690,7 +10695,7 @@
               <a:buNone/>
             </a:pPr>
             <a:r>
-              <a:rPr lang="en-US" sz="3000" i="0" u="none" strike="noStrike" cap="none" dirty="0" err="1">
+              <a:rPr lang="en-US" sz="3000" b="1" i="0" u="none" strike="noStrike" cap="none" dirty="0" err="1">
                 <a:solidFill>
                   <a:srgbClr val="00FF00"/>
                 </a:solidFill>
@@ -10702,7 +10707,7 @@
               <a:t>elif</a:t>
             </a:r>
             <a:r>
-              <a:rPr lang="en-US" sz="3000" i="0" u="none" strike="noStrike" cap="none" dirty="0">
+              <a:rPr lang="en-US" sz="3000" b="1" i="0" u="none" strike="noStrike" cap="none" dirty="0">
                 <a:solidFill>
                   <a:schemeClr val="lt1"/>
                 </a:solidFill>
@@ -10722,7 +10727,7 @@
               <a:buSzPct val="25000"/>
             </a:pPr>
             <a:r>
-              <a:rPr lang="en-US" sz="3000" i="0" u="none" strike="noStrike" cap="none" dirty="0">
+              <a:rPr lang="en-US" sz="3000" b="1" i="0" u="none" strike="noStrike" cap="none" dirty="0">
                 <a:solidFill>
                   <a:schemeClr val="lt1"/>
                 </a:solidFill>
@@ -10734,7 +10739,7 @@
               <a:t>    </a:t>
             </a:r>
             <a:r>
-              <a:rPr lang="en-US" sz="3000" i="0" u="none" strike="noStrike" cap="none" dirty="0">
+              <a:rPr lang="en-US" sz="3000" b="1" i="0" u="none" strike="noStrike" cap="none" dirty="0">
                 <a:solidFill>
                   <a:srgbClr val="00FF00"/>
                 </a:solidFill>
@@ -10746,7 +10751,7 @@
               <a:t>print(</a:t>
             </a:r>
             <a:r>
-              <a:rPr lang="en-US" sz="3000" i="0" u="none" strike="noStrike" cap="none" dirty="0">
+              <a:rPr lang="en-US" sz="3000" b="1" i="0" u="none" strike="noStrike" cap="none" dirty="0">
                 <a:solidFill>
                   <a:schemeClr val="lt1"/>
                 </a:solidFill>
@@ -10758,7 +10763,7 @@
               <a:t>'</a:t>
             </a:r>
             <a:r>
-              <a:rPr lang="en-US" sz="3000" dirty="0">
+              <a:rPr lang="en-US" sz="3000" b="1" dirty="0">
                 <a:solidFill>
                   <a:schemeClr val="lt1"/>
                 </a:solidFill>
@@ -10770,7 +10775,7 @@
               <a:t>Medium'</a:t>
             </a:r>
             <a:r>
-              <a:rPr lang="en-US" sz="3000" dirty="0">
+              <a:rPr lang="en-US" sz="3000" b="1" dirty="0">
                 <a:solidFill>
                   <a:srgbClr val="00FF00"/>
                 </a:solidFill>
@@ -10781,7 +10786,7 @@
               </a:rPr>
               <a:t>)</a:t>
             </a:r>
-            <a:endParaRPr lang="en-US" sz="3000" i="0" u="none" strike="noStrike" cap="none" dirty="0">
+            <a:endParaRPr lang="en-US" sz="3000" b="1" i="0" u="none" strike="noStrike" cap="none" dirty="0">
               <a:solidFill>
                 <a:schemeClr val="lt1"/>
               </a:solidFill>
@@ -10810,7 +10815,7 @@
               <a:buNone/>
             </a:pPr>
             <a:r>
-              <a:rPr lang="en-US" sz="3000" i="0" u="none" strike="noStrike" cap="none" dirty="0">
+              <a:rPr lang="en-US" sz="3000" b="1" i="0" u="none" strike="noStrike" cap="none" dirty="0">
                 <a:solidFill>
                   <a:srgbClr val="00FF00"/>
                 </a:solidFill>
@@ -10822,7 +10827,7 @@
               <a:t>else</a:t>
             </a:r>
             <a:r>
-              <a:rPr lang="en-US" sz="3000" i="0" u="none" strike="noStrike" cap="none" dirty="0">
+              <a:rPr lang="en-US" sz="3000" b="1" i="0" u="none" strike="noStrike" cap="none" dirty="0">
                 <a:solidFill>
                   <a:schemeClr val="lt1"/>
                 </a:solidFill>
@@ -10842,7 +10847,7 @@
               <a:buSzPct val="25000"/>
             </a:pPr>
             <a:r>
-              <a:rPr lang="en-US" sz="3000" i="0" u="none" strike="noStrike" cap="none" dirty="0">
+              <a:rPr lang="en-US" sz="3000" b="1" i="0" u="none" strike="noStrike" cap="none" dirty="0">
                 <a:solidFill>
                   <a:schemeClr val="lt1"/>
                 </a:solidFill>
@@ -10854,7 +10859,7 @@
               <a:t>    </a:t>
             </a:r>
             <a:r>
-              <a:rPr lang="en-US" sz="3000" i="0" u="none" strike="noStrike" cap="none" dirty="0">
+              <a:rPr lang="en-US" sz="3000" b="1" i="0" u="none" strike="noStrike" cap="none" dirty="0">
                 <a:solidFill>
                   <a:srgbClr val="00FF00"/>
                 </a:solidFill>
@@ -10866,7 +10871,7 @@
               <a:t>print(</a:t>
             </a:r>
             <a:r>
-              <a:rPr lang="en-US" sz="3000" i="0" u="none" strike="noStrike" cap="none" dirty="0">
+              <a:rPr lang="en-US" sz="3000" b="1" i="0" u="none" strike="noStrike" cap="none" dirty="0">
                 <a:solidFill>
                   <a:schemeClr val="lt1"/>
                 </a:solidFill>
@@ -10878,7 +10883,7 @@
               <a:t>'LARGE'</a:t>
             </a:r>
             <a:r>
-              <a:rPr lang="en-US" sz="3000" dirty="0">
+              <a:rPr lang="en-US" sz="3000" b="1" dirty="0">
                 <a:solidFill>
                   <a:srgbClr val="00FF00"/>
                 </a:solidFill>
@@ -10889,7 +10894,7 @@
               </a:rPr>
               <a:t>)</a:t>
             </a:r>
-            <a:endParaRPr lang="en-US" sz="3000" i="0" u="none" strike="noStrike" cap="none" dirty="0">
+            <a:endParaRPr lang="en-US" sz="3000" b="1" i="0" u="none" strike="noStrike" cap="none" dirty="0">
               <a:solidFill>
                 <a:schemeClr val="lt1"/>
               </a:solidFill>
@@ -10907,7 +10912,7 @@
               <a:buSzPct val="25000"/>
             </a:pPr>
             <a:r>
-              <a:rPr lang="en-US" sz="3000" i="0" u="none" strike="noStrike" cap="none" dirty="0">
+              <a:rPr lang="en-US" sz="3000" b="1" i="0" u="none" strike="noStrike" cap="none" dirty="0">
                 <a:solidFill>
                   <a:srgbClr val="FFC000"/>
                 </a:solidFill>
@@ -10919,7 +10924,7 @@
               <a:t>print</a:t>
             </a:r>
             <a:r>
-              <a:rPr lang="en-US" sz="3000" dirty="0">
+              <a:rPr lang="en-US" sz="3000" b="1" dirty="0">
                 <a:solidFill>
                   <a:srgbClr val="FFC000"/>
                 </a:solidFill>
@@ -10931,7 +10936,7 @@
               <a:t>(</a:t>
             </a:r>
             <a:r>
-              <a:rPr lang="en-US" sz="3000" i="0" u="none" strike="noStrike" cap="none" dirty="0">
+              <a:rPr lang="en-US" sz="3000" b="1" i="0" u="none" strike="noStrike" cap="none" dirty="0">
                 <a:solidFill>
                   <a:srgbClr val="FFC000"/>
                 </a:solidFill>
@@ -10943,7 +10948,7 @@
               <a:t>'All done'</a:t>
             </a:r>
             <a:r>
-              <a:rPr lang="en-US" sz="3000" dirty="0">
+              <a:rPr lang="en-US" sz="3000" b="1" dirty="0">
                 <a:solidFill>
                   <a:srgbClr val="FFC000"/>
                 </a:solidFill>
@@ -10954,7 +10959,7 @@
               </a:rPr>
               <a:t>)</a:t>
             </a:r>
-            <a:endParaRPr lang="en-US" sz="3000" i="0" u="none" strike="noStrike" cap="none" dirty="0">
+            <a:endParaRPr lang="en-US" sz="3000" b="1" i="0" u="none" strike="noStrike" cap="none" dirty="0">
               <a:solidFill>
                 <a:srgbClr val="FFC000"/>
               </a:solidFill>
@@ -11015,13 +11020,13 @@
               <a:buNone/>
             </a:pPr>
             <a:r>
-              <a:rPr lang="en-US" sz="3700" u="none" strike="noStrike" cap="none" dirty="0">
+              <a:rPr lang="en-US" sz="3200" b="1" u="none" strike="noStrike" cap="none" dirty="0">
                 <a:solidFill>
                   <a:schemeClr val="lt1"/>
                 </a:solidFill>
-                <a:latin typeface="Arial" charset="0"/>
+                <a:latin typeface="Courier New" panose="02070309020205020404" pitchFamily="49" charset="0"/>
                 <a:ea typeface="Arial" charset="0"/>
-                <a:cs typeface="Arial" charset="0"/>
+                <a:cs typeface="Courier New" panose="02070309020205020404" pitchFamily="49" charset="0"/>
                 <a:sym typeface="Cabin"/>
               </a:rPr>
               <a:t>x &lt; 2</a:t>
@@ -11078,37 +11083,37 @@
               <a:buNone/>
             </a:pPr>
             <a:r>
-              <a:rPr lang="en-US" sz="3200" u="none" strike="noStrike" cap="none" dirty="0">
+              <a:rPr lang="en-US" sz="2400" b="1" u="none" strike="noStrike" cap="none" dirty="0">
                 <a:solidFill>
                   <a:schemeClr val="lt1"/>
                 </a:solidFill>
-                <a:latin typeface="Arial" charset="0"/>
+                <a:latin typeface="Courier New" panose="02070309020205020404" pitchFamily="49" charset="0"/>
                 <a:ea typeface="Arial" charset="0"/>
-                <a:cs typeface="Arial" charset="0"/>
+                <a:cs typeface="Courier New" panose="02070309020205020404" pitchFamily="49" charset="0"/>
                 <a:sym typeface="Cabin"/>
               </a:rPr>
               <a:t>print('</a:t>
             </a:r>
             <a:r>
-              <a:rPr lang="en-US" sz="3200" dirty="0">
+              <a:rPr lang="en-US" sz="2400" b="1" dirty="0">
                 <a:solidFill>
                   <a:schemeClr val="lt1"/>
                 </a:solidFill>
-                <a:latin typeface="Arial" charset="0"/>
+                <a:latin typeface="Courier New" panose="02070309020205020404" pitchFamily="49" charset="0"/>
                 <a:ea typeface="Arial" charset="0"/>
-                <a:cs typeface="Arial" charset="0"/>
+                <a:cs typeface="Courier New" panose="02070309020205020404" pitchFamily="49" charset="0"/>
                 <a:sym typeface="Cabin"/>
               </a:rPr>
               <a:t>s</a:t>
             </a:r>
             <a:r>
-              <a:rPr lang="en-US" sz="3200" u="none" strike="noStrike" cap="none" dirty="0">
+              <a:rPr lang="en-US" sz="2400" b="1" u="none" strike="noStrike" cap="none" dirty="0">
                 <a:solidFill>
                   <a:schemeClr val="lt1"/>
                 </a:solidFill>
-                <a:latin typeface="Arial" charset="0"/>
+                <a:latin typeface="Courier New" panose="02070309020205020404" pitchFamily="49" charset="0"/>
                 <a:ea typeface="Arial" charset="0"/>
-                <a:cs typeface="Arial" charset="0"/>
+                <a:cs typeface="Courier New" panose="02070309020205020404" pitchFamily="49" charset="0"/>
                 <a:sym typeface="Cabin"/>
               </a:rPr>
               <a:t>mall')</a:t>
@@ -11211,13 +11216,13 @@
               <a:buNone/>
             </a:pPr>
             <a:r>
-              <a:rPr lang="en-US" sz="3200" u="none" strike="noStrike" cap="none" dirty="0">
+              <a:rPr lang="en-US" sz="2400" b="1" u="none" strike="noStrike" cap="none" dirty="0">
                 <a:solidFill>
                   <a:schemeClr val="lt1"/>
                 </a:solidFill>
-                <a:latin typeface="Arial" charset="0"/>
+                <a:latin typeface="Courier New" panose="02070309020205020404" pitchFamily="49" charset="0"/>
                 <a:ea typeface="Arial" charset="0"/>
-                <a:cs typeface="Arial" charset="0"/>
+                <a:cs typeface="Courier New" panose="02070309020205020404" pitchFamily="49" charset="0"/>
                 <a:sym typeface="Cabin"/>
               </a:rPr>
               <a:t>yes</a:t>
@@ -11268,13 +11273,13 @@
               <a:buNone/>
             </a:pPr>
             <a:r>
-              <a:rPr lang="en-US" sz="3200" u="none" strike="noStrike" cap="none" dirty="0">
+              <a:rPr lang="en-US" sz="2400" b="1" u="none" strike="noStrike" cap="none" dirty="0">
                 <a:solidFill>
                   <a:schemeClr val="lt1"/>
                 </a:solidFill>
-                <a:latin typeface="Arial" charset="0"/>
+                <a:latin typeface="Courier New" panose="02070309020205020404" pitchFamily="49" charset="0"/>
                 <a:ea typeface="Arial" charset="0"/>
-                <a:cs typeface="Arial" charset="0"/>
+                <a:cs typeface="Courier New" panose="02070309020205020404" pitchFamily="49" charset="0"/>
                 <a:sym typeface="Cabin"/>
               </a:rPr>
               <a:t>no</a:t>
@@ -11368,8 +11373,8 @@
         </p:nvSpPr>
         <p:spPr>
           <a:xfrm>
-            <a:off x="7805527" y="7373911"/>
-            <a:ext cx="3061023" cy="852065"/>
+            <a:off x="7334133" y="7375430"/>
+            <a:ext cx="4183212" cy="852065"/>
           </a:xfrm>
           <a:prstGeom prst="rect">
             <a:avLst/>
@@ -11409,13 +11414,13 @@
               <a:buNone/>
             </a:pPr>
             <a:r>
-              <a:rPr lang="en-US" sz="3300" u="none" strike="noStrike" cap="none" dirty="0">
+              <a:rPr lang="en-US" sz="2800" b="1" u="none" strike="noStrike" cap="none" dirty="0">
                 <a:solidFill>
                   <a:schemeClr val="lt1"/>
                 </a:solidFill>
-                <a:latin typeface="Arial" charset="0"/>
+                <a:latin typeface="Courier New" panose="02070309020205020404" pitchFamily="49" charset="0"/>
                 <a:ea typeface="Arial" charset="0"/>
-                <a:cs typeface="Arial" charset="0"/>
+                <a:cs typeface="Courier New" panose="02070309020205020404" pitchFamily="49" charset="0"/>
                 <a:sym typeface="Cabin"/>
               </a:rPr>
               <a:t>print('All Done')</a:t>
@@ -11472,13 +11477,13 @@
               <a:buNone/>
             </a:pPr>
             <a:r>
-              <a:rPr lang="en-US" sz="3700" u="none" strike="noStrike" cap="none" dirty="0">
+              <a:rPr lang="en-US" sz="3200" b="1" u="none" strike="noStrike" cap="none" dirty="0">
                 <a:solidFill>
                   <a:schemeClr val="lt1"/>
                 </a:solidFill>
-                <a:latin typeface="Arial" charset="0"/>
+                <a:latin typeface="Courier New" panose="02070309020205020404" pitchFamily="49" charset="0"/>
                 <a:ea typeface="Arial" charset="0"/>
-                <a:cs typeface="Arial" charset="0"/>
+                <a:cs typeface="Courier New" panose="02070309020205020404" pitchFamily="49" charset="0"/>
                 <a:sym typeface="Cabin"/>
               </a:rPr>
               <a:t>x &lt; 10</a:t>
@@ -11535,13 +11540,13 @@
               <a:buNone/>
             </a:pPr>
             <a:r>
-              <a:rPr lang="en-US" sz="3200" u="none" strike="noStrike" cap="none" dirty="0">
+              <a:rPr lang="en-US" sz="2400" b="1" u="none" strike="noStrike" cap="none" dirty="0">
                 <a:solidFill>
                   <a:schemeClr val="lt1"/>
                 </a:solidFill>
-                <a:latin typeface="Arial" charset="0"/>
+                <a:latin typeface="Courier New" panose="02070309020205020404" pitchFamily="49" charset="0"/>
                 <a:ea typeface="Arial" charset="0"/>
-                <a:cs typeface="Arial" charset="0"/>
+                <a:cs typeface="Courier New" panose="02070309020205020404" pitchFamily="49" charset="0"/>
                 <a:sym typeface="Cabin"/>
               </a:rPr>
               <a:t>print('Medium')</a:t>
@@ -11618,13 +11623,13 @@
               <a:buNone/>
             </a:pPr>
             <a:r>
-              <a:rPr lang="en-US" sz="3200" u="none" strike="noStrike" cap="none" dirty="0">
+              <a:rPr lang="en-US" sz="2400" b="1" u="none" strike="noStrike" cap="none" dirty="0">
                 <a:solidFill>
                   <a:schemeClr val="lt1"/>
                 </a:solidFill>
-                <a:latin typeface="Arial" charset="0"/>
+                <a:latin typeface="Courier New" panose="02070309020205020404" pitchFamily="49" charset="0"/>
                 <a:ea typeface="Arial" charset="0"/>
-                <a:cs typeface="Arial" charset="0"/>
+                <a:cs typeface="Courier New" panose="02070309020205020404" pitchFamily="49" charset="0"/>
                 <a:sym typeface="Cabin"/>
               </a:rPr>
               <a:t>yes</a:t>
@@ -11759,13 +11764,13 @@
               <a:buNone/>
             </a:pPr>
             <a:r>
-              <a:rPr lang="en-US" sz="3200" u="none" strike="noStrike" cap="none" dirty="0">
+              <a:rPr lang="en-US" sz="2400" b="1" u="none" strike="noStrike" cap="none" dirty="0">
                 <a:solidFill>
                   <a:schemeClr val="lt1"/>
                 </a:solidFill>
-                <a:latin typeface="Arial" charset="0"/>
+                <a:latin typeface="Courier New" panose="02070309020205020404" pitchFamily="49" charset="0"/>
                 <a:ea typeface="Arial" charset="0"/>
-                <a:cs typeface="Arial" charset="0"/>
+                <a:cs typeface="Courier New" panose="02070309020205020404" pitchFamily="49" charset="0"/>
                 <a:sym typeface="Cabin"/>
               </a:rPr>
               <a:t>print('LARGE')</a:t>
@@ -11842,13 +11847,13 @@
               <a:buNone/>
             </a:pPr>
             <a:r>
-              <a:rPr lang="en-US" sz="3200" u="none" strike="noStrike" cap="none" dirty="0">
+              <a:rPr lang="en-US" sz="2400" b="1" u="none" strike="noStrike" cap="none" dirty="0">
                 <a:solidFill>
                   <a:schemeClr val="lt1"/>
                 </a:solidFill>
-                <a:latin typeface="Arial" charset="0"/>
+                <a:latin typeface="Courier New" panose="02070309020205020404" pitchFamily="49" charset="0"/>
                 <a:ea typeface="Arial" charset="0"/>
-                <a:cs typeface="Arial" charset="0"/>
+                <a:cs typeface="Courier New" panose="02070309020205020404" pitchFamily="49" charset="0"/>
                 <a:sym typeface="Cabin"/>
               </a:rPr>
               <a:t>no</a:t>
@@ -11905,25 +11910,25 @@
               <a:buNone/>
             </a:pPr>
             <a:r>
-              <a:rPr lang="en-US" sz="3600" dirty="0">
+              <a:rPr lang="en-US" sz="2800" b="1" dirty="0">
                 <a:solidFill>
                   <a:srgbClr val="FFFFFF"/>
                 </a:solidFill>
-                <a:latin typeface="Arial" charset="0"/>
+                <a:latin typeface="Courier New" panose="02070309020205020404" pitchFamily="49" charset="0"/>
                 <a:ea typeface="Arial" charset="0"/>
-                <a:cs typeface="Arial" charset="0"/>
+                <a:cs typeface="Courier New" panose="02070309020205020404" pitchFamily="49" charset="0"/>
                 <a:sym typeface="Cabin"/>
               </a:rPr>
               <a:t>x</a:t>
             </a:r>
             <a:r>
-              <a:rPr lang="en-US" sz="3600" u="none" strike="noStrike" cap="none" dirty="0">
+              <a:rPr lang="en-US" sz="2800" b="1" u="none" strike="noStrike" cap="none" dirty="0">
                 <a:solidFill>
                   <a:srgbClr val="FFFFFF"/>
                 </a:solidFill>
-                <a:latin typeface="Arial" charset="0"/>
+                <a:latin typeface="Courier New" panose="02070309020205020404" pitchFamily="49" charset="0"/>
                 <a:ea typeface="Arial" charset="0"/>
-                <a:cs typeface="Arial" charset="0"/>
+                <a:cs typeface="Courier New" panose="02070309020205020404" pitchFamily="49" charset="0"/>
                 <a:sym typeface="Cabin"/>
               </a:rPr>
               <a:t> = 0</a:t>
